--- a/Topic_B/Exam_Practice/TB-L05_Speaking_Workshop_Furniture_Furnishings_and_Appliances.pptx
+++ b/Topic_B/Exam_Practice/TB-L05_Speaking_Workshop_Furniture_Furnishings_and_Appliances.pptx
@@ -615,7 +615,11 @@
           <a:lstStyle/>
           <a:p>
             <a:r>
-              <a:rPr lang="en-US" dirty="0"/>
+              <a:rPr lang="ar-SA" dirty="0">
+                <a:latin typeface="Amiri" pitchFamily="2" charset="-78"/>
+                <a:ea typeface="Amiri" pitchFamily="2" charset="-78"/>
+                <a:cs typeface="Amiri" pitchFamily="2" charset="-78"/>
+              </a:rPr>
               <a:t>ROLE PLAY C (Develop) — redecorating.
 SET-UP IN THE BREAKOUT ROOM: A = examiner (reads the left column ONLY — the questions, in order), B = candidate (sees the task column; Core may use the help column), C = observer (ticks the feedback checklist). 1 minute preparation, about 3 minutes speaking, 1 minute feedback, then rotate.
 Task ! is the unexpected question: in the exam the candidate has not seen it — the examiner should read it without warning.
@@ -707,7 +711,11 @@
           <a:lstStyle/>
           <a:p>
             <a:r>
-              <a:rPr lang="en-US" dirty="0"/>
+              <a:rPr lang="ar-SA" dirty="0">
+                <a:latin typeface="Amiri" pitchFamily="2" charset="-78"/>
+                <a:ea typeface="Amiri" pitchFamily="2" charset="-78"/>
+                <a:cs typeface="Amiri" pitchFamily="2" charset="-78"/>
+              </a:rPr>
               <a:t>ROLE PLAY D (Stretch) — a tech show.
 SET-UP IN THE BREAKOUT ROOM: A = examiner (reads the left column ONLY — the questions, in order), B = candidate (sees the task column; Core may use the help column), C = observer (ticks the feedback checklist). 1 minute preparation, about 3 minutes speaking, 1 minute feedback, then rotate.
 Task ! is the unexpected question: in the exam the candidate has not seen it — the examiner should read it without warning.
@@ -1243,7 +1251,11 @@
           <a:lstStyle/>
           <a:p>
             <a:r>
-              <a:rPr lang="en-US" dirty="0"/>
+              <a:rPr lang="ar-SA" dirty="0">
+                <a:latin typeface="Amiri" pitchFamily="2" charset="-78"/>
+                <a:ea typeface="Amiri" pitchFamily="2" charset="-78"/>
+                <a:cs typeface="Amiri" pitchFamily="2" charset="-78"/>
+              </a:rPr>
               <a:t>TOPIC CONVERSATION — Core. Examiner asks the questions in order and may add “لِمَاذَا؟ / هَلْ يُمْكِنُ أَنْ تَشْرَحَ أَكْثَرَ؟” to push for more. Candidate aims for one full sentence per question.
 </a:t>
             </a:r>
@@ -1332,7 +1344,11 @@
           <a:lstStyle/>
           <a:p>
             <a:r>
-              <a:rPr lang="en-US" dirty="0"/>
+              <a:rPr lang="ar-SA" dirty="0">
+                <a:latin typeface="Amiri" pitchFamily="2" charset="-78"/>
+                <a:ea typeface="Amiri" pitchFamily="2" charset="-78"/>
+                <a:cs typeface="Amiri" pitchFamily="2" charset="-78"/>
+              </a:rPr>
               <a:t>TOPIC CONVERSATION — Develop. Examiner asks the questions in order and may add “لِمَاذَا؟ / هَلْ يُمْكِنُ أَنْ تَشْرَحَ أَكْثَرَ؟” to push for more. Candidate aims for two or three sentences, with a reason or a past detail.
 </a:t>
             </a:r>
@@ -1421,7 +1437,11 @@
           <a:lstStyle/>
           <a:p>
             <a:r>
-              <a:rPr lang="en-US" dirty="0"/>
+              <a:rPr lang="ar-SA" dirty="0">
+                <a:latin typeface="Amiri" pitchFamily="2" charset="-78"/>
+                <a:ea typeface="Amiri" pitchFamily="2" charset="-78"/>
+                <a:cs typeface="Amiri" pitchFamily="2" charset="-78"/>
+              </a:rPr>
               <a:t>TOPIC CONVERSATION — Stretch. Examiner asks the questions in order and may add “لِمَاذَا؟ / هَلْ يُمْكِنُ أَنْ تَشْرَحَ أَكْثَرَ؟” to push for more. Candidate aims for a developed answer: opinion, comparison, concession and a conditional.
 </a:t>
             </a:r>
@@ -1510,7 +1530,11 @@
           <a:lstStyle/>
           <a:p>
             <a:r>
-              <a:rPr lang="en-US" dirty="0"/>
+              <a:rPr lang="ar-SA" dirty="0">
+                <a:latin typeface="Amiri" pitchFamily="2" charset="-78"/>
+                <a:ea typeface="Amiri" pitchFamily="2" charset="-78"/>
+                <a:cs typeface="Amiri" pitchFamily="2" charset="-78"/>
+              </a:rPr>
               <a:t>WELCOME (1 min) — while students join.
 • Greet each student by name as they arrive: السَّلَامُ عَلَيْكُمْ. Take the register (Pastoral Tracker: attendance 0/1).
 • 2-MINUTE CHECK-IN (SEND training): a private chat to any student who seemed unsettled last lesson — “Are you okay today? 👍 / 👎”.
@@ -2224,7 +2248,11 @@
           <a:lstStyle/>
           <a:p>
             <a:r>
-              <a:rPr lang="en-US" dirty="0"/>
+              <a:rPr lang="ar-SA" dirty="0">
+                <a:latin typeface="Amiri" pitchFamily="2" charset="-78"/>
+                <a:ea typeface="Amiri" pitchFamily="2" charset="-78"/>
+                <a:cs typeface="Amiri" pitchFamily="2" charset="-78"/>
+              </a:rPr>
               <a:t>TEACH (3 min). Role play = precise and complete; conversation = develop. Choral repetition of the repair phrases. To a girl: تُعِيدِي.</a:t>
             </a:r>
             <a:endParaRPr lang="en-US" dirty="0"/>
@@ -2312,7 +2340,11 @@
           <a:lstStyle/>
           <a:p>
             <a:r>
-              <a:rPr lang="en-US" dirty="0"/>
+              <a:rPr lang="ar-SA" dirty="0">
+                <a:latin typeface="Amiri" pitchFamily="2" charset="-78"/>
+                <a:ea typeface="Amiri" pitchFamily="2" charset="-78"/>
+                <a:cs typeface="Amiri" pitchFamily="2" charset="-78"/>
+              </a:rPr>
               <a:t>LANGUAGE BANK (2 min) — iḍāfa: خِزَانَةُ المَلَابِسِ · غُرْفَةُ النَّوْمِ · بَابُ الثَّلَّاجَةِ — the first word has no al- and no tanwīn. Broken plurals: أَسِرَّةٌ · رُفُوفٌ · سَتَائِرُ.</a:t>
             </a:r>
             <a:endParaRPr lang="en-US" dirty="0"/>
@@ -2400,7 +2432,11 @@
           <a:lstStyle/>
           <a:p>
             <a:r>
-              <a:rPr lang="en-US" dirty="0"/>
+              <a:rPr lang="ar-SA" dirty="0">
+                <a:latin typeface="Amiri" pitchFamily="2" charset="-78"/>
+                <a:ea typeface="Amiri" pitchFamily="2" charset="-78"/>
+                <a:cs typeface="Amiri" pitchFamily="2" charset="-78"/>
+              </a:rPr>
               <a:t>LANGUAGE BANK (2 min) — the pronoun matches the noun: الفُرْنُ → نَسْتَعْمِلُهُ · الثَّلَّاجَةُ → نَسْتَعْمِلُهَا. Relative: الغَسَّالَةُ الَّتِي اشْتَرَيْنَاهَا مُعَطَّلَةٌ.</a:t>
             </a:r>
             <a:endParaRPr lang="en-US" dirty="0"/>
@@ -2576,7 +2612,11 @@
           <a:lstStyle/>
           <a:p>
             <a:r>
-              <a:rPr lang="en-US" dirty="0"/>
+              <a:rPr lang="ar-SA" dirty="0">
+                <a:latin typeface="Amiri" pitchFamily="2" charset="-78"/>
+                <a:ea typeface="Amiri" pitchFamily="2" charset="-78"/>
+                <a:cs typeface="Amiri" pitchFamily="2" charset="-78"/>
+              </a:rPr>
               <a:t>ROLE PLAY A (Core) — in a furniture shop.
 SET-UP IN THE BREAKOUT ROOM: A = examiner (reads the left column ONLY — the questions, in order), B = candidate (sees the task column; Core may use the help column), C = observer (ticks the feedback checklist). 1 minute preparation, about 3 minutes speaking, 1 minute feedback, then rotate.
 Task ! is the unexpected question: in the exam the candidate has not seen it — the examiner should read it without warning.
@@ -2668,7 +2708,11 @@
           <a:lstStyle/>
           <a:p>
             <a:r>
-              <a:rPr lang="en-US" dirty="0"/>
+              <a:rPr lang="ar-SA" dirty="0">
+                <a:latin typeface="Amiri" pitchFamily="2" charset="-78"/>
+                <a:ea typeface="Amiri" pitchFamily="2" charset="-78"/>
+                <a:cs typeface="Amiri" pitchFamily="2" charset="-78"/>
+              </a:rPr>
               <a:t>ROLE PLAY B (Core+) — calling the landlord.
 SET-UP IN THE BREAKOUT ROOM: A = examiner (reads the left column ONLY — the questions, in order), B = candidate (sees the task column; Core may use the help column), C = observer (ticks the feedback checklist). 1 minute preparation, about 3 minutes speaking, 1 minute feedback, then rotate.
 Task ! is the unexpected question: in the exam the candidate has not seen it — the examiner should read it without warning.
@@ -3156,6 +3200,7 @@
                   <a:srgbClr val="D4AF37"/>
                 </a:solidFill>
                 <a:latin typeface="Amiri" pitchFamily="2" charset="-78"/>
+                <a:ea typeface="Amiri" pitchFamily="2" charset="-78"/>
                 <a:cs typeface="Amiri" pitchFamily="2" charset="-78"/>
               </a:rPr>
               <a:t>م</a:t>
@@ -3362,6 +3407,7 @@
                   <a:srgbClr val="D4AF37"/>
                 </a:solidFill>
                 <a:latin typeface="Amiri" pitchFamily="2" charset="-78"/>
+                <a:ea typeface="Amiri" pitchFamily="2" charset="-78"/>
                 <a:cs typeface="Amiri" pitchFamily="2" charset="-78"/>
               </a:rPr>
               <a:t>وَرْشَةُ التَّحَدُّثِ — الأَثَاثُ وَالأَجْهِزَةُ</a:t>
@@ -3819,6 +3865,7 @@
                   <a:srgbClr val="D4AF37"/>
                 </a:solidFill>
                 <a:latin typeface="Amiri" pitchFamily="2" charset="-78"/>
+                <a:ea typeface="Amiri" pitchFamily="2" charset="-78"/>
                 <a:cs typeface="Amiri" pitchFamily="2" charset="-78"/>
               </a:rPr>
               <a:t>م</a:t>
@@ -4139,6 +4186,7 @@
                   <a:srgbClr val="8A6D1E"/>
                 </a:solidFill>
                 <a:latin typeface="Amiri" pitchFamily="2" charset="-78"/>
+                <a:ea typeface="Amiri" pitchFamily="2" charset="-78"/>
                 <a:cs typeface="Amiri" pitchFamily="2" charset="-78"/>
               </a:rPr>
               <a:t>غُرْفَتِي الجَدِيدَةُ</a:t>
@@ -4419,6 +4467,7 @@
                   <a:srgbClr val="1B3B6F"/>
                 </a:solidFill>
                 <a:latin typeface="Amiri" pitchFamily="2" charset="-78"/>
+                <a:ea typeface="Amiri" pitchFamily="2" charset="-78"/>
                 <a:cs typeface="Amiri" pitchFamily="2" charset="-78"/>
               </a:rPr>
               <a:t>لِأَنَّ الأَثَاثَ … وَ…</a:t>
@@ -4495,6 +4544,7 @@
                   <a:srgbClr val="1B3B6F"/>
                 </a:solidFill>
                 <a:latin typeface="Amiri" pitchFamily="2" charset="-78"/>
+                <a:ea typeface="Amiri" pitchFamily="2" charset="-78"/>
                 <a:cs typeface="Amiri" pitchFamily="2" charset="-78"/>
               </a:rPr>
               <a:t>تُرِيدُ أَنْ تُغَيِّرَ غُرْفَتَكَ؟ لِمَاذَا؟</a:t>
@@ -4598,6 +4648,7 @@
                   <a:srgbClr val="1B3B6F"/>
                 </a:solidFill>
                 <a:latin typeface="Amiri" pitchFamily="2" charset="-78"/>
+                <a:ea typeface="Amiri" pitchFamily="2" charset="-78"/>
                 <a:cs typeface="Amiri" pitchFamily="2" charset="-78"/>
               </a:rPr>
               <a:t>أُرِيدُ … وَأَنْ أَضَعَ … بِجَانِبِ …</a:t>
@@ -4674,6 +4725,7 @@
                   <a:srgbClr val="1B3B6F"/>
                 </a:solidFill>
                 <a:latin typeface="Amiri" pitchFamily="2" charset="-78"/>
+                <a:ea typeface="Amiri" pitchFamily="2" charset="-78"/>
                 <a:cs typeface="Amiri" pitchFamily="2" charset="-78"/>
               </a:rPr>
               <a:t>مَاذَا تُرِيدُ أَنْ تُغَيِّرَ؟</a:t>
@@ -4777,6 +4829,7 @@
                   <a:srgbClr val="1B3B6F"/>
                 </a:solidFill>
                 <a:latin typeface="Amiri" pitchFamily="2" charset="-78"/>
+                <a:ea typeface="Amiri" pitchFamily="2" charset="-78"/>
                 <a:cs typeface="Amiri" pitchFamily="2" charset="-78"/>
               </a:rPr>
               <a:t>نُعْطِيهَا لِابْنِ عَمِّي … لِأَنَّهَا …</a:t>
@@ -4853,6 +4906,7 @@
                   <a:srgbClr val="1B3B6F"/>
                 </a:solidFill>
                 <a:latin typeface="Amiri" pitchFamily="2" charset="-78"/>
+                <a:ea typeface="Amiri" pitchFamily="2" charset="-78"/>
                 <a:cs typeface="Amiri" pitchFamily="2" charset="-78"/>
               </a:rPr>
               <a:t>وَالخِزَانَةُ القَدِيمَةُ؟</a:t>
@@ -4956,6 +5010,7 @@
                   <a:srgbClr val="1B3B6F"/>
                 </a:solidFill>
                 <a:latin typeface="Amiri" pitchFamily="2" charset="-78"/>
+                <a:ea typeface="Amiri" pitchFamily="2" charset="-78"/>
                 <a:cs typeface="Amiri" pitchFamily="2" charset="-78"/>
               </a:rPr>
               <a:t>مَا رَأْيُكَ أَنْ …؟</a:t>
@@ -5032,6 +5087,7 @@
                   <a:srgbClr val="1B3B6F"/>
                 </a:solidFill>
                 <a:latin typeface="Amiri" pitchFamily="2" charset="-78"/>
+                <a:ea typeface="Amiri" pitchFamily="2" charset="-78"/>
                 <a:cs typeface="Amiri" pitchFamily="2" charset="-78"/>
               </a:rPr>
               <a:t>لٰكِنَّ المِيزَانِيَّةَ صَغِيرَةٌ!</a:t>
@@ -5135,6 +5191,7 @@
                   <a:srgbClr val="1B3B6F"/>
                 </a:solidFill>
                 <a:latin typeface="Amiri" pitchFamily="2" charset="-78"/>
+                <a:ea typeface="Amiri" pitchFamily="2" charset="-78"/>
                 <a:cs typeface="Amiri" pitchFamily="2" charset="-78"/>
               </a:rPr>
               <a:t>سَيُسَاعِدُنِي … وَسَنُنْهِي …</a:t>
@@ -5211,6 +5268,7 @@
                   <a:srgbClr val="1B3B6F"/>
                 </a:solidFill>
                 <a:latin typeface="Amiri" pitchFamily="2" charset="-78"/>
+                <a:ea typeface="Amiri" pitchFamily="2" charset="-78"/>
                 <a:cs typeface="Amiri" pitchFamily="2" charset="-78"/>
               </a:rPr>
               <a:t>مَنْ سَيُسَاعِدُكَ فِي العَمَلِ؟</a:t>
@@ -5420,6 +5478,7 @@
                   <a:srgbClr val="D4AF37"/>
                 </a:solidFill>
                 <a:latin typeface="Amiri" pitchFamily="2" charset="-78"/>
+                <a:ea typeface="Amiri" pitchFamily="2" charset="-78"/>
                 <a:cs typeface="Amiri" pitchFamily="2" charset="-78"/>
               </a:rPr>
               <a:t>م</a:t>
@@ -5740,6 +5799,7 @@
                   <a:srgbClr val="8A6D1E"/>
                 </a:solidFill>
                 <a:latin typeface="Amiri" pitchFamily="2" charset="-78"/>
+                <a:ea typeface="Amiri" pitchFamily="2" charset="-78"/>
                 <a:cs typeface="Amiri" pitchFamily="2" charset="-78"/>
               </a:rPr>
               <a:t>البَيْتُ الذَّكِيُّ</a:t>
@@ -6020,6 +6080,7 @@
                   <a:srgbClr val="1B3B6F"/>
                 </a:solidFill>
                 <a:latin typeface="Amiri" pitchFamily="2" charset="-78"/>
+                <a:ea typeface="Amiri" pitchFamily="2" charset="-78"/>
                 <a:cs typeface="Amiri" pitchFamily="2" charset="-78"/>
               </a:rPr>
               <a:t>الجِهَازُ الَّذِي … هُوَ … لِأَنَّهُ …</a:t>
@@ -6096,6 +6157,7 @@
                   <a:srgbClr val="1B3B6F"/>
                 </a:solidFill>
                 <a:latin typeface="Amiri" pitchFamily="2" charset="-78"/>
+                <a:ea typeface="Amiri" pitchFamily="2" charset="-78"/>
                 <a:cs typeface="Amiri" pitchFamily="2" charset="-78"/>
               </a:rPr>
               <a:t>مَا الجِهَازُ الَّذِي لَا تَسْتَطِيعُ أَنْ تَعِيشَ بِدُونِهِ؟</a:t>
@@ -6199,6 +6261,7 @@
                   <a:srgbClr val="1B3B6F"/>
                 </a:solidFill>
                 <a:latin typeface="Amiri" pitchFamily="2" charset="-78"/>
+                <a:ea typeface="Amiri" pitchFamily="2" charset="-78"/>
                 <a:cs typeface="Amiri" pitchFamily="2" charset="-78"/>
               </a:rPr>
               <a:t>كَانَ النَّاسُ … أَمَّا اليَوْمَ فَتَغْسِلُهَا …</a:t>
@@ -6275,6 +6338,7 @@
                   <a:srgbClr val="1B3B6F"/>
                 </a:solidFill>
                 <a:latin typeface="Amiri" pitchFamily="2" charset="-78"/>
+                <a:ea typeface="Amiri" pitchFamily="2" charset="-78"/>
                 <a:cs typeface="Amiri" pitchFamily="2" charset="-78"/>
               </a:rPr>
               <a:t>كَيْفَ كَانَتِ البُيُوتُ قَبْلَ هٰذِهِ الأَجْهِزَةِ؟</a:t>
@@ -6378,6 +6442,7 @@
                   <a:srgbClr val="1B3B6F"/>
                 </a:solidFill>
                 <a:latin typeface="Amiri" pitchFamily="2" charset="-78"/>
+                <a:ea typeface="Amiri" pitchFamily="2" charset="-78"/>
                 <a:cs typeface="Amiri" pitchFamily="2" charset="-78"/>
               </a:rPr>
               <a:t>مِنْ نَاحِيَةٍ … وَمِنْ نَاحِيَةٍ أُخْرَى …</a:t>
@@ -6454,6 +6519,7 @@
                   <a:srgbClr val="1B3B6F"/>
                 </a:solidFill>
                 <a:latin typeface="Amiri" pitchFamily="2" charset="-78"/>
+                <a:ea typeface="Amiri" pitchFamily="2" charset="-78"/>
                 <a:cs typeface="Amiri" pitchFamily="2" charset="-78"/>
               </a:rPr>
               <a:t>مَا رَأْيُكَ فِي البُيُوتِ الذَّكِيَّةِ؟</a:t>
@@ -6557,6 +6623,7 @@
                   <a:srgbClr val="1B3B6F"/>
                 </a:solidFill>
                 <a:latin typeface="Amiri" pitchFamily="2" charset="-78"/>
+                <a:ea typeface="Amiri" pitchFamily="2" charset="-78"/>
                 <a:cs typeface="Amiri" pitchFamily="2" charset="-78"/>
               </a:rPr>
               <a:t>صَحِيحٌ أَنَّ … غَيْرَ أَنَّ …</a:t>
@@ -6633,6 +6700,7 @@
                   <a:srgbClr val="1B3B6F"/>
                 </a:solidFill>
                 <a:latin typeface="Amiri" pitchFamily="2" charset="-78"/>
+                <a:ea typeface="Amiri" pitchFamily="2" charset="-78"/>
                 <a:cs typeface="Amiri" pitchFamily="2" charset="-78"/>
               </a:rPr>
               <a:t>هَلْ تَجْعَلُنَا الأَجْهِزَةُ كُسَالَى؟</a:t>
@@ -6736,6 +6804,7 @@
                   <a:srgbClr val="1B3B6F"/>
                 </a:solidFill>
                 <a:latin typeface="Amiri" pitchFamily="2" charset="-78"/>
+                <a:ea typeface="Amiri" pitchFamily="2" charset="-78"/>
                 <a:cs typeface="Amiri" pitchFamily="2" charset="-78"/>
               </a:rPr>
               <a:t>لَوِ اخْتَرَعْتُ جِهَازًا، لَجَعَلْتُهُ …</a:t>
@@ -6812,6 +6881,7 @@
                   <a:srgbClr val="1B3B6F"/>
                 </a:solidFill>
                 <a:latin typeface="Amiri" pitchFamily="2" charset="-78"/>
+                <a:ea typeface="Amiri" pitchFamily="2" charset="-78"/>
                 <a:cs typeface="Amiri" pitchFamily="2" charset="-78"/>
               </a:rPr>
               <a:t>لَوِ اخْتَرَعْتَ جِهَازًا جَدِيدًا لِلْبَيْتِ، فَمَاذَا يَفْعَلُ؟</a:t>
@@ -7021,6 +7091,7 @@
                   <a:srgbClr val="D4AF37"/>
                 </a:solidFill>
                 <a:latin typeface="Amiri" pitchFamily="2" charset="-78"/>
+                <a:ea typeface="Amiri" pitchFamily="2" charset="-78"/>
                 <a:cs typeface="Amiri" pitchFamily="2" charset="-78"/>
               </a:rPr>
               <a:t>م</a:t>
@@ -7341,6 +7412,7 @@
                   <a:srgbClr val="8A6D1E"/>
                 </a:solidFill>
                 <a:latin typeface="Amiri" pitchFamily="2" charset="-78"/>
+                <a:ea typeface="Amiri" pitchFamily="2" charset="-78"/>
                 <a:cs typeface="Amiri" pitchFamily="2" charset="-78"/>
               </a:rPr>
               <a:t>وَرَقَةُ المُلَاحِظِ</a:t>
@@ -8811,6 +8883,7 @@
                   <a:srgbClr val="D4AF37"/>
                 </a:solidFill>
                 <a:latin typeface="Amiri" pitchFamily="2" charset="-78"/>
+                <a:ea typeface="Amiri" pitchFamily="2" charset="-78"/>
                 <a:cs typeface="Amiri" pitchFamily="2" charset="-78"/>
               </a:rPr>
               <a:t>م</a:t>
@@ -9131,6 +9204,7 @@
                   <a:srgbClr val="8A6D1E"/>
                 </a:solidFill>
                 <a:latin typeface="Amiri" pitchFamily="2" charset="-78"/>
+                <a:ea typeface="Amiri" pitchFamily="2" charset="-78"/>
                 <a:cs typeface="Amiri" pitchFamily="2" charset="-78"/>
               </a:rPr>
               <a:t>نَمُوذَجُ الإِجَابَةِ</a:t>
@@ -9373,6 +9447,7 @@
                   <a:srgbClr val="1B3B6F"/>
                 </a:solidFill>
                 <a:latin typeface="Amiri" pitchFamily="2" charset="-78"/>
+                <a:ea typeface="Amiri" pitchFamily="2" charset="-78"/>
                 <a:cs typeface="Amiri" pitchFamily="2" charset="-78"/>
               </a:rPr>
               <a:t>أُرِيدُ مَكْتَبًا وَكُرْسِيًّا لِغُرْفَتِي، مِنْ فَضْلِكَ.</a:t>
@@ -9449,6 +9524,7 @@
                   <a:srgbClr val="1B3B6F"/>
                 </a:solidFill>
                 <a:latin typeface="Amiri" pitchFamily="2" charset="-78"/>
+                <a:ea typeface="Amiri" pitchFamily="2" charset="-78"/>
                 <a:cs typeface="Amiri" pitchFamily="2" charset="-78"/>
               </a:rPr>
               <a:t>أَهْلًا، مَاذَا تُرِيدُ؟</a:t>
@@ -9552,6 +9628,7 @@
                   <a:srgbClr val="1B3B6F"/>
                 </a:solidFill>
                 <a:latin typeface="Amiri" pitchFamily="2" charset="-78"/>
+                <a:ea typeface="Amiri" pitchFamily="2" charset="-78"/>
                 <a:cs typeface="Amiri" pitchFamily="2" charset="-78"/>
               </a:rPr>
               <a:t>أُفَضِّلُ اللَّوْنَ الأَبْيَضَ، لِأَنَّ غُرْفَتِي صَغِيرَةٌ.</a:t>
@@ -9628,6 +9705,7 @@
                   <a:srgbClr val="1B3B6F"/>
                 </a:solidFill>
                 <a:latin typeface="Amiri" pitchFamily="2" charset="-78"/>
+                <a:ea typeface="Amiri" pitchFamily="2" charset="-78"/>
                 <a:cs typeface="Amiri" pitchFamily="2" charset="-78"/>
               </a:rPr>
               <a:t>أَيَّ لَوْنٍ تُفَضِّلُ؟</a:t>
@@ -9731,6 +9809,7 @@
                   <a:srgbClr val="1B3B6F"/>
                 </a:solidFill>
                 <a:latin typeface="Amiri" pitchFamily="2" charset="-78"/>
+                <a:ea typeface="Amiri" pitchFamily="2" charset="-78"/>
                 <a:cs typeface="Amiri" pitchFamily="2" charset="-78"/>
               </a:rPr>
               <a:t>هٰذَا غَالٍ قَلِيلًا، هَلْ عِنْدَكُمْ مَكْتَبٌ أَرْخَصُ؟</a:t>
@@ -9807,6 +9886,7 @@
                   <a:srgbClr val="1B3B6F"/>
                 </a:solidFill>
                 <a:latin typeface="Amiri" pitchFamily="2" charset="-78"/>
+                <a:ea typeface="Amiri" pitchFamily="2" charset="-78"/>
                 <a:cs typeface="Amiri" pitchFamily="2" charset="-78"/>
               </a:rPr>
               <a:t>هٰذَا المَكْتَبُ بِمِئَةِ جُنَيْهٍ.</a:t>
@@ -9910,6 +9990,7 @@
                   <a:srgbClr val="1B3B6F"/>
                 </a:solidFill>
                 <a:latin typeface="Amiri" pitchFamily="2" charset="-78"/>
+                <a:ea typeface="Amiri" pitchFamily="2" charset="-78"/>
                 <a:cs typeface="Amiri" pitchFamily="2" charset="-78"/>
               </a:rPr>
               <a:t>مُمْتَازٌ، سَآخُذُهُ، وَسَأَضَعُهُ بِجَانِبِ النَّافِذَةِ.</a:t>
@@ -9986,6 +10067,7 @@
                   <a:srgbClr val="1B3B6F"/>
                 </a:solidFill>
                 <a:latin typeface="Amiri" pitchFamily="2" charset="-78"/>
+                <a:ea typeface="Amiri" pitchFamily="2" charset="-78"/>
                 <a:cs typeface="Amiri" pitchFamily="2" charset="-78"/>
               </a:rPr>
               <a:t>هٰذَا بِسِتِّينَ جُنَيْهًا، وَفِيهِ ثَلَاثَةُ أَدْرَاجٍ.</a:t>
@@ -10089,6 +10171,7 @@
                   <a:srgbClr val="1B3B6F"/>
                 </a:solidFill>
                 <a:latin typeface="Amiri" pitchFamily="2" charset="-78"/>
+                <a:ea typeface="Amiri" pitchFamily="2" charset="-78"/>
                 <a:cs typeface="Amiri" pitchFamily="2" charset="-78"/>
               </a:rPr>
               <a:t>نَعَمْ، مِنْ فَضْلِكَ، يَوْمَ السَّبْتِ فِي الصَّبَاحِ.</a:t>
@@ -10165,6 +10248,7 @@
                   <a:srgbClr val="1B3B6F"/>
                 </a:solidFill>
                 <a:latin typeface="Amiri" pitchFamily="2" charset="-78"/>
+                <a:ea typeface="Amiri" pitchFamily="2" charset="-78"/>
                 <a:cs typeface="Amiri" pitchFamily="2" charset="-78"/>
               </a:rPr>
               <a:t>هَلْ تُرِيدُ أَنْ نُوَصِّلَهُ إِلَى بَيْتِكَ؟</a:t>
@@ -10374,6 +10458,7 @@
                   <a:srgbClr val="D4AF37"/>
                 </a:solidFill>
                 <a:latin typeface="Amiri" pitchFamily="2" charset="-78"/>
+                <a:ea typeface="Amiri" pitchFamily="2" charset="-78"/>
                 <a:cs typeface="Amiri" pitchFamily="2" charset="-78"/>
               </a:rPr>
               <a:t>م</a:t>
@@ -10694,6 +10779,7 @@
                   <a:srgbClr val="8A6D1E"/>
                 </a:solidFill>
                 <a:latin typeface="Amiri" pitchFamily="2" charset="-78"/>
+                <a:ea typeface="Amiri" pitchFamily="2" charset="-78"/>
                 <a:cs typeface="Amiri" pitchFamily="2" charset="-78"/>
               </a:rPr>
               <a:t>نَمُوذَجُ الإِجَابَةِ</a:t>
@@ -10936,6 +11022,7 @@
                   <a:srgbClr val="1B3B6F"/>
                 </a:solidFill>
                 <a:latin typeface="Amiri" pitchFamily="2" charset="-78"/>
+                <a:ea typeface="Amiri" pitchFamily="2" charset="-78"/>
                 <a:cs typeface="Amiri" pitchFamily="2" charset="-78"/>
               </a:rPr>
               <a:t>مَسَاءَ الخَيْرِ، الغَسَّالَةُ فِي شَقَّتِنَا مُعَطَّلَةٌ.</a:t>
@@ -11012,6 +11099,7 @@
                   <a:srgbClr val="1B3B6F"/>
                 </a:solidFill>
                 <a:latin typeface="Amiri" pitchFamily="2" charset="-78"/>
+                <a:ea typeface="Amiri" pitchFamily="2" charset="-78"/>
                 <a:cs typeface="Amiri" pitchFamily="2" charset="-78"/>
               </a:rPr>
               <a:t>أَلُو، نَعَمْ؟</a:t>
@@ -11115,6 +11203,7 @@
                   <a:srgbClr val="1B3B6F"/>
                 </a:solidFill>
                 <a:latin typeface="Amiri" pitchFamily="2" charset="-78"/>
+                <a:ea typeface="Amiri" pitchFamily="2" charset="-78"/>
                 <a:cs typeface="Amiri" pitchFamily="2" charset="-78"/>
               </a:rPr>
               <a:t>مُنْذُ يَوْمِ الإِثْنَيْنِ، أَيْ مُنْذُ ثَلَاثَةِ أَيَّامٍ.</a:t>
@@ -11191,6 +11280,7 @@
                   <a:srgbClr val="1B3B6F"/>
                 </a:solidFill>
                 <a:latin typeface="Amiri" pitchFamily="2" charset="-78"/>
+                <a:ea typeface="Amiri" pitchFamily="2" charset="-78"/>
                 <a:cs typeface="Amiri" pitchFamily="2" charset="-78"/>
               </a:rPr>
               <a:t>مُنْذُ مَتَى؟</a:t>
@@ -11294,6 +11384,7 @@
                   <a:srgbClr val="1B3B6F"/>
                 </a:solidFill>
                 <a:latin typeface="Amiri" pitchFamily="2" charset="-78"/>
+                <a:ea typeface="Amiri" pitchFamily="2" charset="-78"/>
                 <a:cs typeface="Amiri" pitchFamily="2" charset="-78"/>
               </a:rPr>
               <a:t>عِنْدَمَا نُشَغِّلُهَا، يَخْرُجُ المَاءُ عَلَى الأَرْضِ، وَلَا تَغْسِلُ المَلَابِسَ.</a:t>
@@ -11370,6 +11461,7 @@
                   <a:srgbClr val="1B3B6F"/>
                 </a:solidFill>
                 <a:latin typeface="Amiri" pitchFamily="2" charset="-78"/>
+                <a:ea typeface="Amiri" pitchFamily="2" charset="-78"/>
                 <a:cs typeface="Amiri" pitchFamily="2" charset="-78"/>
               </a:rPr>
               <a:t>مَا المُشْكِلَةُ بِالضَّبْطِ؟</a:t>
@@ -11473,6 +11565,7 @@
                   <a:srgbClr val="1B3B6F"/>
                 </a:solidFill>
                 <a:latin typeface="Amiri" pitchFamily="2" charset="-78"/>
+                <a:ea typeface="Amiri" pitchFamily="2" charset="-78"/>
                 <a:cs typeface="Amiri" pitchFamily="2" charset="-78"/>
               </a:rPr>
               <a:t>شُكْرًا، وَمَتَى سَيَأْتِي الفَنِّيُّ؟ لِأَنَّنَا نَحْتَاجُهَا كُلَّ يَوْمٍ.</a:t>
@@ -11549,6 +11642,7 @@
                   <a:srgbClr val="1B3B6F"/>
                 </a:solidFill>
                 <a:latin typeface="Amiri" pitchFamily="2" charset="-78"/>
+                <a:ea typeface="Amiri" pitchFamily="2" charset="-78"/>
                 <a:cs typeface="Amiri" pitchFamily="2" charset="-78"/>
               </a:rPr>
               <a:t>سَأُرْسِلُ فَنِّيًّا.</a:t>
@@ -11652,6 +11746,7 @@
                   <a:srgbClr val="1B3B6F"/>
                 </a:solidFill>
                 <a:latin typeface="Amiri" pitchFamily="2" charset="-78"/>
+                <a:ea typeface="Amiri" pitchFamily="2" charset="-78"/>
                 <a:cs typeface="Amiri" pitchFamily="2" charset="-78"/>
               </a:rPr>
               <a:t>نَعَمْ، بَابُ الثَّلَّاجَةِ لَا يُغْلَقُ جَيِّدًا أَيْضًا.</a:t>
@@ -11728,6 +11823,7 @@
                   <a:srgbClr val="1B3B6F"/>
                 </a:solidFill>
                 <a:latin typeface="Amiri" pitchFamily="2" charset="-78"/>
+                <a:ea typeface="Amiri" pitchFamily="2" charset="-78"/>
                 <a:cs typeface="Amiri" pitchFamily="2" charset="-78"/>
               </a:rPr>
               <a:t>هَلْ هُنَاكَ مُشْكِلَةٌ أُخْرَى؟</a:t>
@@ -11937,6 +12033,7 @@
                   <a:srgbClr val="D4AF37"/>
                 </a:solidFill>
                 <a:latin typeface="Amiri" pitchFamily="2" charset="-78"/>
+                <a:ea typeface="Amiri" pitchFamily="2" charset="-78"/>
                 <a:cs typeface="Amiri" pitchFamily="2" charset="-78"/>
               </a:rPr>
               <a:t>م</a:t>
@@ -12257,6 +12354,7 @@
                   <a:srgbClr val="8A6D1E"/>
                 </a:solidFill>
                 <a:latin typeface="Amiri" pitchFamily="2" charset="-78"/>
+                <a:ea typeface="Amiri" pitchFamily="2" charset="-78"/>
                 <a:cs typeface="Amiri" pitchFamily="2" charset="-78"/>
               </a:rPr>
               <a:t>نَمُوذَجُ الإِجَابَةِ</a:t>
@@ -12499,6 +12597,7 @@
                   <a:srgbClr val="1B3B6F"/>
                 </a:solidFill>
                 <a:latin typeface="Amiri" pitchFamily="2" charset="-78"/>
+                <a:ea typeface="Amiri" pitchFamily="2" charset="-78"/>
                 <a:cs typeface="Amiri" pitchFamily="2" charset="-78"/>
               </a:rPr>
               <a:t>لِأَنَّ الأَثَاثَ قَدِيمٌ، وَالسَّرِيرُ صَغِيرٌ عَلَيَّ الآنَ.</a:t>
@@ -12575,6 +12674,7 @@
                   <a:srgbClr val="1B3B6F"/>
                 </a:solidFill>
                 <a:latin typeface="Amiri" pitchFamily="2" charset="-78"/>
+                <a:ea typeface="Amiri" pitchFamily="2" charset="-78"/>
                 <a:cs typeface="Amiri" pitchFamily="2" charset="-78"/>
               </a:rPr>
               <a:t>تُرِيدُ أَنْ تُغَيِّرَ غُرْفَتَكَ؟ لِمَاذَا؟</a:t>
@@ -12678,6 +12778,7 @@
                   <a:srgbClr val="1B3B6F"/>
                 </a:solidFill>
                 <a:latin typeface="Amiri" pitchFamily="2" charset="-78"/>
+                <a:ea typeface="Amiri" pitchFamily="2" charset="-78"/>
                 <a:cs typeface="Amiri" pitchFamily="2" charset="-78"/>
               </a:rPr>
               <a:t>أُرِيدُ سَرِيرًا أَكْبَرَ، وَأَنْ أَضَعَ رُفُوفًا لِلْكُتُبِ فَوْقَ المَكْتَبِ.</a:t>
@@ -12754,6 +12855,7 @@
                   <a:srgbClr val="1B3B6F"/>
                 </a:solidFill>
                 <a:latin typeface="Amiri" pitchFamily="2" charset="-78"/>
+                <a:ea typeface="Amiri" pitchFamily="2" charset="-78"/>
                 <a:cs typeface="Amiri" pitchFamily="2" charset="-78"/>
               </a:rPr>
               <a:t>مَاذَا تُرِيدُ أَنْ تُغَيِّرَ؟</a:t>
@@ -12857,6 +12959,7 @@
                   <a:srgbClr val="1B3B6F"/>
                 </a:solidFill>
                 <a:latin typeface="Amiri" pitchFamily="2" charset="-78"/>
+                <a:ea typeface="Amiri" pitchFamily="2" charset="-78"/>
                 <a:cs typeface="Amiri" pitchFamily="2" charset="-78"/>
               </a:rPr>
               <a:t>نُعْطِيهَا لِابْنِ عَمِّي، لِأَنَّهَا مَا زَالَتْ جَيِّدَةً وَهُوَ يَحْتَاجُهَا.</a:t>
@@ -12933,6 +13036,7 @@
                   <a:srgbClr val="1B3B6F"/>
                 </a:solidFill>
                 <a:latin typeface="Amiri" pitchFamily="2" charset="-78"/>
+                <a:ea typeface="Amiri" pitchFamily="2" charset="-78"/>
                 <a:cs typeface="Amiri" pitchFamily="2" charset="-78"/>
               </a:rPr>
               <a:t>وَالخِزَانَةُ القَدِيمَةُ؟</a:t>
@@ -13036,6 +13140,7 @@
                   <a:srgbClr val="1B3B6F"/>
                 </a:solidFill>
                 <a:latin typeface="Amiri" pitchFamily="2" charset="-78"/>
+                <a:ea typeface="Amiri" pitchFamily="2" charset="-78"/>
                 <a:cs typeface="Amiri" pitchFamily="2" charset="-78"/>
               </a:rPr>
               <a:t>مَا رَأْيُكَ أَنْ نَصْبُغَ المَكْتَبَ القَدِيمَ بَدَلًا مِنْ أَنْ نَشْتَرِيَ مَكْتَبًا جَدِيدًا؟</a:t>
@@ -13112,6 +13217,7 @@
                   <a:srgbClr val="1B3B6F"/>
                 </a:solidFill>
                 <a:latin typeface="Amiri" pitchFamily="2" charset="-78"/>
+                <a:ea typeface="Amiri" pitchFamily="2" charset="-78"/>
                 <a:cs typeface="Amiri" pitchFamily="2" charset="-78"/>
               </a:rPr>
               <a:t>لٰكِنَّ المِيزَانِيَّةَ صَغِيرَةٌ!</a:t>
@@ -13215,6 +13321,7 @@
                   <a:srgbClr val="1B3B6F"/>
                 </a:solidFill>
                 <a:latin typeface="Amiri" pitchFamily="2" charset="-78"/>
+                <a:ea typeface="Amiri" pitchFamily="2" charset="-78"/>
                 <a:cs typeface="Amiri" pitchFamily="2" charset="-78"/>
               </a:rPr>
               <a:t>سَيُسَاعِدُنِي أَخِي يَوْمَ السَّبْتِ، وَسَنُنْهِي كُلَّ شَيْءٍ قَبْلَ المَسَاءِ.</a:t>
@@ -13291,6 +13398,7 @@
                   <a:srgbClr val="1B3B6F"/>
                 </a:solidFill>
                 <a:latin typeface="Amiri" pitchFamily="2" charset="-78"/>
+                <a:ea typeface="Amiri" pitchFamily="2" charset="-78"/>
                 <a:cs typeface="Amiri" pitchFamily="2" charset="-78"/>
               </a:rPr>
               <a:t>مَنْ سَيُسَاعِدُكَ فِي العَمَلِ؟</a:t>
@@ -13500,6 +13608,7 @@
                   <a:srgbClr val="D4AF37"/>
                 </a:solidFill>
                 <a:latin typeface="Amiri" pitchFamily="2" charset="-78"/>
+                <a:ea typeface="Amiri" pitchFamily="2" charset="-78"/>
                 <a:cs typeface="Amiri" pitchFamily="2" charset="-78"/>
               </a:rPr>
               <a:t>م</a:t>
@@ -13820,6 +13929,7 @@
                   <a:srgbClr val="8A6D1E"/>
                 </a:solidFill>
                 <a:latin typeface="Amiri" pitchFamily="2" charset="-78"/>
+                <a:ea typeface="Amiri" pitchFamily="2" charset="-78"/>
                 <a:cs typeface="Amiri" pitchFamily="2" charset="-78"/>
               </a:rPr>
               <a:t>نَمُوذَجُ الإِجَابَةِ</a:t>
@@ -14062,6 +14172,7 @@
                   <a:srgbClr val="1B3B6F"/>
                 </a:solidFill>
                 <a:latin typeface="Amiri" pitchFamily="2" charset="-78"/>
+                <a:ea typeface="Amiri" pitchFamily="2" charset="-78"/>
                 <a:cs typeface="Amiri" pitchFamily="2" charset="-78"/>
               </a:rPr>
               <a:t>الجِهَازُ الَّذِي لَا أَسْتَطِيعُ أَنْ أَعِيشَ بِدُونِهِ هُوَ الثَّلَّاجَةُ، لِأَنَّهَا تَحْفَظُ الطَّعَامَ طَازَجًا.</a:t>
@@ -14138,6 +14249,7 @@
                   <a:srgbClr val="1B3B6F"/>
                 </a:solidFill>
                 <a:latin typeface="Amiri" pitchFamily="2" charset="-78"/>
+                <a:ea typeface="Amiri" pitchFamily="2" charset="-78"/>
                 <a:cs typeface="Amiri" pitchFamily="2" charset="-78"/>
               </a:rPr>
               <a:t>مَا الجِهَازُ الَّذِي لَا تَسْتَطِيعُ أَنْ تَعِيشَ بِدُونِهِ؟</a:t>
@@ -14241,6 +14353,7 @@
                   <a:srgbClr val="1B3B6F"/>
                 </a:solidFill>
                 <a:latin typeface="Amiri" pitchFamily="2" charset="-78"/>
+                <a:ea typeface="Amiri" pitchFamily="2" charset="-78"/>
                 <a:cs typeface="Amiri" pitchFamily="2" charset="-78"/>
               </a:rPr>
               <a:t>كَانَ النَّاسُ يَغْسِلُونَ المَلَابِسَ بِأَيْدِيهِمْ سَاعَاتٍ، أَمَّا اليَوْمَ فَتَغْسِلُهَا الآلَةُ وَنَحْنُ نَدْرُسُ.</a:t>
@@ -14317,6 +14430,7 @@
                   <a:srgbClr val="1B3B6F"/>
                 </a:solidFill>
                 <a:latin typeface="Amiri" pitchFamily="2" charset="-78"/>
+                <a:ea typeface="Amiri" pitchFamily="2" charset="-78"/>
                 <a:cs typeface="Amiri" pitchFamily="2" charset="-78"/>
               </a:rPr>
               <a:t>كَيْفَ كَانَتِ البُيُوتُ قَبْلَ هٰذِهِ الأَجْهِزَةِ؟</a:t>
@@ -14420,6 +14534,7 @@
                   <a:srgbClr val="1B3B6F"/>
                 </a:solidFill>
                 <a:latin typeface="Amiri" pitchFamily="2" charset="-78"/>
+                <a:ea typeface="Amiri" pitchFamily="2" charset="-78"/>
                 <a:cs typeface="Amiri" pitchFamily="2" charset="-78"/>
               </a:rPr>
               <a:t>مِنْ نَاحِيَةٍ تُوَفِّرُ الوَقْتَ وَالكَهْرَبَاءَ، وَمِنْ نَاحِيَةٍ أُخْرَى قَدْ يَسْرِقُ المُخْتَرِقُونَ مَعْلُومَاتِنَا.</a:t>
@@ -14496,6 +14611,7 @@
                   <a:srgbClr val="1B3B6F"/>
                 </a:solidFill>
                 <a:latin typeface="Amiri" pitchFamily="2" charset="-78"/>
+                <a:ea typeface="Amiri" pitchFamily="2" charset="-78"/>
                 <a:cs typeface="Amiri" pitchFamily="2" charset="-78"/>
               </a:rPr>
               <a:t>مَا رَأْيُكَ فِي البُيُوتِ الذَّكِيَّةِ؟</a:t>
@@ -14599,6 +14715,7 @@
                   <a:srgbClr val="1B3B6F"/>
                 </a:solidFill>
                 <a:latin typeface="Amiri" pitchFamily="2" charset="-78"/>
+                <a:ea typeface="Amiri" pitchFamily="2" charset="-78"/>
                 <a:cs typeface="Amiri" pitchFamily="2" charset="-78"/>
               </a:rPr>
               <a:t>صَحِيحٌ أَنَّهَا تَجْعَلُنَا نَتَحَرَّكُ أَقَلَّ، غَيْرَ أَنَّهَا تُعْطِينَا وَقْتًا لِلْقِرَاءَةِ وَالعَائِلَةِ.</a:t>
@@ -14675,6 +14792,7 @@
                   <a:srgbClr val="1B3B6F"/>
                 </a:solidFill>
                 <a:latin typeface="Amiri" pitchFamily="2" charset="-78"/>
+                <a:ea typeface="Amiri" pitchFamily="2" charset="-78"/>
                 <a:cs typeface="Amiri" pitchFamily="2" charset="-78"/>
               </a:rPr>
               <a:t>هَلْ تَجْعَلُنَا الأَجْهِزَةُ كُسَالَى؟</a:t>
@@ -14778,6 +14896,7 @@
                   <a:srgbClr val="1B3B6F"/>
                 </a:solidFill>
                 <a:latin typeface="Amiri" pitchFamily="2" charset="-78"/>
+                <a:ea typeface="Amiri" pitchFamily="2" charset="-78"/>
                 <a:cs typeface="Amiri" pitchFamily="2" charset="-78"/>
               </a:rPr>
               <a:t>لَوِ اخْتَرَعْتُ جِهَازًا، لَجَعَلْتُهُ يُرَتِّبُ غُرْفَتِي وَيَطْوِي مَلَابِسِي وَحْدَهُ!</a:t>
@@ -14854,6 +14973,7 @@
                   <a:srgbClr val="1B3B6F"/>
                 </a:solidFill>
                 <a:latin typeface="Amiri" pitchFamily="2" charset="-78"/>
+                <a:ea typeface="Amiri" pitchFamily="2" charset="-78"/>
                 <a:cs typeface="Amiri" pitchFamily="2" charset="-78"/>
               </a:rPr>
               <a:t>لَوِ اخْتَرَعْتَ جِهَازًا جَدِيدًا لِلْبَيْتِ، فَمَاذَا يَفْعَلُ؟</a:t>
@@ -15063,6 +15183,7 @@
                   <a:srgbClr val="D4AF37"/>
                 </a:solidFill>
                 <a:latin typeface="Amiri" pitchFamily="2" charset="-78"/>
+                <a:ea typeface="Amiri" pitchFamily="2" charset="-78"/>
                 <a:cs typeface="Amiri" pitchFamily="2" charset="-78"/>
               </a:rPr>
               <a:t>م</a:t>
@@ -15383,6 +15504,7 @@
                   <a:srgbClr val="8A6D1E"/>
                 </a:solidFill>
                 <a:latin typeface="Amiri" pitchFamily="2" charset="-78"/>
+                <a:ea typeface="Amiri" pitchFamily="2" charset="-78"/>
                 <a:cs typeface="Amiri" pitchFamily="2" charset="-78"/>
               </a:rPr>
               <a:t>أَثَاثُ بَيْتِي</a:t>
@@ -15663,6 +15785,7 @@
                   <a:srgbClr val="1B3B6F"/>
                 </a:solidFill>
                 <a:latin typeface="Amiri" pitchFamily="2" charset="-78"/>
+                <a:ea typeface="Amiri" pitchFamily="2" charset="-78"/>
                 <a:cs typeface="Amiri" pitchFamily="2" charset="-78"/>
               </a:rPr>
               <a:t>يُوجَدُ … وَ…</a:t>
@@ -15739,6 +15862,7 @@
                   <a:srgbClr val="1B3B6F"/>
                 </a:solidFill>
                 <a:latin typeface="Amiri" pitchFamily="2" charset="-78"/>
+                <a:ea typeface="Amiri" pitchFamily="2" charset="-78"/>
                 <a:cs typeface="Amiri" pitchFamily="2" charset="-78"/>
               </a:rPr>
               <a:t>مَاذَا يُوجَدُ فِي غُرْفَتِكَ؟</a:t>
@@ -15907,6 +16031,7 @@
                   <a:srgbClr val="1B3B6F"/>
                 </a:solidFill>
                 <a:latin typeface="Amiri" pitchFamily="2" charset="-78"/>
+                <a:ea typeface="Amiri" pitchFamily="2" charset="-78"/>
                 <a:cs typeface="Amiri" pitchFamily="2" charset="-78"/>
               </a:rPr>
               <a:t>أَضَعُهَا عَلَى …</a:t>
@@ -15983,6 +16108,7 @@
                   <a:srgbClr val="1B3B6F"/>
                 </a:solidFill>
                 <a:latin typeface="Amiri" pitchFamily="2" charset="-78"/>
+                <a:ea typeface="Amiri" pitchFamily="2" charset="-78"/>
                 <a:cs typeface="Amiri" pitchFamily="2" charset="-78"/>
               </a:rPr>
               <a:t>أَيْنَ تَضَعُ كُتُبَكَ؟</a:t>
@@ -16151,6 +16277,7 @@
                   <a:srgbClr val="1B3B6F"/>
                 </a:solidFill>
                 <a:latin typeface="Amiri" pitchFamily="2" charset="-78"/>
+                <a:ea typeface="Amiri" pitchFamily="2" charset="-78"/>
                 <a:cs typeface="Amiri" pitchFamily="2" charset="-78"/>
               </a:rPr>
               <a:t>غُرْفَتِي … وَالسَّتَائِرُ …</a:t>
@@ -16227,6 +16354,7 @@
                   <a:srgbClr val="1B3B6F"/>
                 </a:solidFill>
                 <a:latin typeface="Amiri" pitchFamily="2" charset="-78"/>
+                <a:ea typeface="Amiri" pitchFamily="2" charset="-78"/>
                 <a:cs typeface="Amiri" pitchFamily="2" charset="-78"/>
               </a:rPr>
               <a:t>مَا لَوْنُ غُرْفَتِكَ؟</a:t>
@@ -16395,6 +16523,7 @@
                   <a:srgbClr val="1B3B6F"/>
                 </a:solidFill>
                 <a:latin typeface="Amiri" pitchFamily="2" charset="-78"/>
+                <a:ea typeface="Amiri" pitchFamily="2" charset="-78"/>
                 <a:cs typeface="Amiri" pitchFamily="2" charset="-78"/>
               </a:rPr>
               <a:t>أَسْتَعْمِلُ … كَثِيرًا لِأَنَّ …</a:t>
@@ -16471,6 +16600,7 @@
                   <a:srgbClr val="1B3B6F"/>
                 </a:solidFill>
                 <a:latin typeface="Amiri" pitchFamily="2" charset="-78"/>
+                <a:ea typeface="Amiri" pitchFamily="2" charset="-78"/>
                 <a:cs typeface="Amiri" pitchFamily="2" charset="-78"/>
               </a:rPr>
               <a:t>مَا الجِهَازُ الَّذِي تَسْتَعْمِلُهُ كَثِيرًا؟</a:t>
@@ -16639,6 +16769,7 @@
                   <a:srgbClr val="1B3B6F"/>
                 </a:solidFill>
                 <a:latin typeface="Amiri" pitchFamily="2" charset="-78"/>
+                <a:ea typeface="Amiri" pitchFamily="2" charset="-78"/>
                 <a:cs typeface="Amiri" pitchFamily="2" charset="-78"/>
               </a:rPr>
               <a:t>نَعَمْ / لَا، لِأَنَّهُ …</a:t>
@@ -16715,6 +16846,7 @@
                   <a:srgbClr val="1B3B6F"/>
                 </a:solidFill>
                 <a:latin typeface="Amiri" pitchFamily="2" charset="-78"/>
+                <a:ea typeface="Amiri" pitchFamily="2" charset="-78"/>
                 <a:cs typeface="Amiri" pitchFamily="2" charset="-78"/>
               </a:rPr>
               <a:t>هَلْ تُحِبُّ أَثَاثَ غُرْفَتِكَ؟</a:t>
@@ -16869,6 +17001,7 @@
                   <a:srgbClr val="1B3B6F"/>
                 </a:solidFill>
                 <a:latin typeface="Amiri" pitchFamily="2" charset="-78"/>
+                <a:ea typeface="Amiri" pitchFamily="2" charset="-78"/>
                 <a:cs typeface="Amiri" pitchFamily="2" charset="-78"/>
               </a:rPr>
               <a:t>عَفْوًا، هَلْ يُمْكِنُ أَنْ تُعِيدَ السُّؤَالَ؟</a:t>
@@ -17002,6 +17135,7 @@
                   <a:srgbClr val="D4AF37"/>
                 </a:solidFill>
                 <a:latin typeface="Amiri" pitchFamily="2" charset="-78"/>
+                <a:ea typeface="Amiri" pitchFamily="2" charset="-78"/>
                 <a:cs typeface="Amiri" pitchFamily="2" charset="-78"/>
               </a:rPr>
               <a:t>م</a:t>
@@ -17322,6 +17456,7 @@
                   <a:srgbClr val="8A6D1E"/>
                 </a:solidFill>
                 <a:latin typeface="Amiri" pitchFamily="2" charset="-78"/>
+                <a:ea typeface="Amiri" pitchFamily="2" charset="-78"/>
                 <a:cs typeface="Amiri" pitchFamily="2" charset="-78"/>
               </a:rPr>
               <a:t>الأَثَاثُ وَالأَجْهِزَةُ</a:t>
@@ -17602,6 +17737,7 @@
                   <a:srgbClr val="1B3B6F"/>
                 </a:solidFill>
                 <a:latin typeface="Amiri" pitchFamily="2" charset="-78"/>
+                <a:ea typeface="Amiri" pitchFamily="2" charset="-78"/>
                 <a:cs typeface="Amiri" pitchFamily="2" charset="-78"/>
               </a:rPr>
               <a:t>فِي غُرْفَةِ الجُلُوسِ … أَمَامَ … وَعَلَى …</a:t>
@@ -17678,6 +17814,7 @@
                   <a:srgbClr val="1B3B6F"/>
                 </a:solidFill>
                 <a:latin typeface="Amiri" pitchFamily="2" charset="-78"/>
+                <a:ea typeface="Amiri" pitchFamily="2" charset="-78"/>
                 <a:cs typeface="Amiri" pitchFamily="2" charset="-78"/>
               </a:rPr>
               <a:t>صِفْ غُرْفَةَ الجُلُوسِ فِي بَيْتِكُمْ.</a:t>
@@ -17781,6 +17918,7 @@
                   <a:srgbClr val="1B3B6F"/>
                 </a:solidFill>
                 <a:latin typeface="Amiri" pitchFamily="2" charset="-78"/>
+                <a:ea typeface="Amiri" pitchFamily="2" charset="-78"/>
                 <a:cs typeface="Amiri" pitchFamily="2" charset="-78"/>
               </a:rPr>
               <a:t>تَعَطَّلَ … فَطَبَخَتْ …</a:t>
@@ -17857,6 +17995,7 @@
                   <a:srgbClr val="1B3B6F"/>
                 </a:solidFill>
                 <a:latin typeface="Amiri" pitchFamily="2" charset="-78"/>
+                <a:ea typeface="Amiri" pitchFamily="2" charset="-78"/>
                 <a:cs typeface="Amiri" pitchFamily="2" charset="-78"/>
               </a:rPr>
               <a:t>مَا الجِهَازُ الَّذِي تَعَطَّلَ فِي بَيْتِكُمْ مُؤَخَّرًا؟</a:t>
@@ -17960,6 +18099,7 @@
                   <a:srgbClr val="1B3B6F"/>
                 </a:solidFill>
                 <a:latin typeface="Amiri" pitchFamily="2" charset="-78"/>
+                <a:ea typeface="Amiri" pitchFamily="2" charset="-78"/>
                 <a:cs typeface="Amiri" pitchFamily="2" charset="-78"/>
               </a:rPr>
               <a:t>أُرِيدُ أَنْ … لِأَنَّ …</a:t>
@@ -18036,6 +18176,7 @@
                   <a:srgbClr val="1B3B6F"/>
                 </a:solidFill>
                 <a:latin typeface="Amiri" pitchFamily="2" charset="-78"/>
+                <a:ea typeface="Amiri" pitchFamily="2" charset="-78"/>
                 <a:cs typeface="Amiri" pitchFamily="2" charset="-78"/>
               </a:rPr>
               <a:t>مَاذَا تُرِيدُ أَنْ تُغَيِّرَ فِي غُرْفَتِكَ؟</a:t>
@@ -18139,6 +18280,7 @@
                   <a:srgbClr val="1B3B6F"/>
                 </a:solidFill>
                 <a:latin typeface="Amiri" pitchFamily="2" charset="-78"/>
+                <a:ea typeface="Amiri" pitchFamily="2" charset="-78"/>
                 <a:cs typeface="Amiri" pitchFamily="2" charset="-78"/>
               </a:rPr>
               <a:t>أُرَتِّبُهَا … لٰكِنْ …</a:t>
@@ -18215,6 +18357,7 @@
                   <a:srgbClr val="1B3B6F"/>
                 </a:solidFill>
                 <a:latin typeface="Amiri" pitchFamily="2" charset="-78"/>
+                <a:ea typeface="Amiri" pitchFamily="2" charset="-78"/>
                 <a:cs typeface="Amiri" pitchFamily="2" charset="-78"/>
               </a:rPr>
               <a:t>مَنْ يُرَتِّبُ غُرْفَتَكَ؟</a:t>
@@ -18318,6 +18461,7 @@
                   <a:srgbClr val="1B3B6F"/>
                 </a:solidFill>
                 <a:latin typeface="Amiri" pitchFamily="2" charset="-78"/>
+                <a:ea typeface="Amiri" pitchFamily="2" charset="-78"/>
                 <a:cs typeface="Amiri" pitchFamily="2" charset="-78"/>
               </a:rPr>
               <a:t>سَأَحْتَاجُ إِلَى … لِأَنَّ …</a:t>
@@ -18394,6 +18538,7 @@
                   <a:srgbClr val="1B3B6F"/>
                 </a:solidFill>
                 <a:latin typeface="Amiri" pitchFamily="2" charset="-78"/>
+                <a:ea typeface="Amiri" pitchFamily="2" charset="-78"/>
                 <a:cs typeface="Amiri" pitchFamily="2" charset="-78"/>
               </a:rPr>
               <a:t>مَا الأَثَاثُ الَّذِي سَتَحْتَاجُهُ فِي الجَامِعَةِ؟</a:t>
@@ -18603,6 +18748,7 @@
                   <a:srgbClr val="D4AF37"/>
                 </a:solidFill>
                 <a:latin typeface="Amiri" pitchFamily="2" charset="-78"/>
+                <a:ea typeface="Amiri" pitchFamily="2" charset="-78"/>
                 <a:cs typeface="Amiri" pitchFamily="2" charset="-78"/>
               </a:rPr>
               <a:t>م</a:t>
@@ -18923,6 +19069,7 @@
                   <a:srgbClr val="8A6D1E"/>
                 </a:solidFill>
                 <a:latin typeface="Amiri" pitchFamily="2" charset="-78"/>
+                <a:ea typeface="Amiri" pitchFamily="2" charset="-78"/>
                 <a:cs typeface="Amiri" pitchFamily="2" charset="-78"/>
               </a:rPr>
               <a:t>الأَجْهِزَةُ وَالمُجْتَمَعُ</a:t>
@@ -19203,6 +19350,7 @@
                   <a:srgbClr val="1B3B6F"/>
                 </a:solidFill>
                 <a:latin typeface="Amiri" pitchFamily="2" charset="-78"/>
+                <a:ea typeface="Amiri" pitchFamily="2" charset="-78"/>
                 <a:cs typeface="Amiri" pitchFamily="2" charset="-78"/>
               </a:rPr>
               <a:t>نَعَمْ، فِي رَأْيِي … لِأَنَّ …</a:t>
@@ -19279,6 +19427,7 @@
                   <a:srgbClr val="1B3B6F"/>
                 </a:solidFill>
                 <a:latin typeface="Amiri" pitchFamily="2" charset="-78"/>
+                <a:ea typeface="Amiri" pitchFamily="2" charset="-78"/>
                 <a:cs typeface="Amiri" pitchFamily="2" charset="-78"/>
               </a:rPr>
               <a:t>هَلْ نَشْتَرِي أَجْهِزَةً أَكْثَرَ مِمَّا نَحْتَاجُ؟</a:t>
@@ -19382,6 +19531,7 @@
                   <a:srgbClr val="1B3B6F"/>
                 </a:solidFill>
                 <a:latin typeface="Amiri" pitchFamily="2" charset="-78"/>
+                <a:ea typeface="Amiri" pitchFamily="2" charset="-78"/>
                 <a:cs typeface="Amiri" pitchFamily="2" charset="-78"/>
               </a:rPr>
               <a:t>صَحِيحٌ أَنَّ … غَيْرَ أَنَّ …</a:t>
@@ -19458,6 +19608,7 @@
                   <a:srgbClr val="1B3B6F"/>
                 </a:solidFill>
                 <a:latin typeface="Amiri" pitchFamily="2" charset="-78"/>
+                <a:ea typeface="Amiri" pitchFamily="2" charset="-78"/>
                 <a:cs typeface="Amiri" pitchFamily="2" charset="-78"/>
               </a:rPr>
               <a:t>هَلِ الأَثَاثُ القَدِيمُ أَفْضَلُ مِنَ الجَدِيدِ؟</a:t>
@@ -19561,6 +19712,7 @@
                   <a:srgbClr val="1B3B6F"/>
                 </a:solidFill>
                 <a:latin typeface="Amiri" pitchFamily="2" charset="-78"/>
+                <a:ea typeface="Amiri" pitchFamily="2" charset="-78"/>
                 <a:cs typeface="Amiri" pitchFamily="2" charset="-78"/>
               </a:rPr>
               <a:t>يَجِبُ أَنْ … وَأَلَّا …</a:t>
@@ -19637,6 +19789,7 @@
                   <a:srgbClr val="1B3B6F"/>
                 </a:solidFill>
                 <a:latin typeface="Amiri" pitchFamily="2" charset="-78"/>
+                <a:ea typeface="Amiri" pitchFamily="2" charset="-78"/>
                 <a:cs typeface="Amiri" pitchFamily="2" charset="-78"/>
               </a:rPr>
               <a:t>كَيْفَ نُقَلِّلُ اسْتِهْلَاكَ الكَهْرَبَاءِ فِي البَيْتِ؟</a:t>
@@ -19740,6 +19893,7 @@
                   <a:srgbClr val="1B3B6F"/>
                 </a:solidFill>
                 <a:latin typeface="Amiri" pitchFamily="2" charset="-78"/>
+                <a:ea typeface="Amiri" pitchFamily="2" charset="-78"/>
                 <a:cs typeface="Amiri" pitchFamily="2" charset="-78"/>
               </a:rPr>
               <a:t>كَانَ فِي بَيْتِ جَدِّي … أَمَّا عِنْدَنَا فَفِي …</a:t>
@@ -19816,6 +19970,7 @@
                   <a:srgbClr val="1B3B6F"/>
                 </a:solidFill>
                 <a:latin typeface="Amiri" pitchFamily="2" charset="-78"/>
+                <a:ea typeface="Amiri" pitchFamily="2" charset="-78"/>
                 <a:cs typeface="Amiri" pitchFamily="2" charset="-78"/>
               </a:rPr>
               <a:t>كَيْفَ كَانَ بَيْتُ أَجْدَادِكَ مُخْتَلِفًا؟</a:t>
@@ -19919,6 +20074,7 @@
                   <a:srgbClr val="1B3B6F"/>
                 </a:solidFill>
                 <a:latin typeface="Amiri" pitchFamily="2" charset="-78"/>
+                <a:ea typeface="Amiri" pitchFamily="2" charset="-78"/>
                 <a:cs typeface="Amiri" pitchFamily="2" charset="-78"/>
               </a:rPr>
               <a:t>لَوْ عِشْتُ …، لَقَرَأْتُ …</a:t>
@@ -19995,6 +20151,7 @@
                   <a:srgbClr val="1B3B6F"/>
                 </a:solidFill>
                 <a:latin typeface="Amiri" pitchFamily="2" charset="-78"/>
+                <a:ea typeface="Amiri" pitchFamily="2" charset="-78"/>
                 <a:cs typeface="Amiri" pitchFamily="2" charset="-78"/>
               </a:rPr>
               <a:t>لَوْ كَانَ عَلَيْكَ أَنْ تَعِيشَ أُسْبُوعًا بِلَا كَهْرَبَاءَ، كَيْفَ تَقْضِيهِ؟</a:t>
@@ -20204,6 +20361,7 @@
                   <a:srgbClr val="D4AF37"/>
                 </a:solidFill>
                 <a:latin typeface="Amiri" pitchFamily="2" charset="-78"/>
+                <a:ea typeface="Amiri" pitchFamily="2" charset="-78"/>
                 <a:cs typeface="Amiri" pitchFamily="2" charset="-78"/>
               </a:rPr>
               <a:t>م</a:t>
@@ -20524,6 +20682,7 @@
                   <a:srgbClr val="8A6D1E"/>
                 </a:solidFill>
                 <a:latin typeface="Amiri" pitchFamily="2" charset="-78"/>
+                <a:ea typeface="Amiri" pitchFamily="2" charset="-78"/>
                 <a:cs typeface="Amiri" pitchFamily="2" charset="-78"/>
               </a:rPr>
               <a:t>آدَابُ الصَّفِّ</a:t>
@@ -22055,6 +22214,7 @@
                   <a:srgbClr val="D4AF37"/>
                 </a:solidFill>
                 <a:latin typeface="Amiri" pitchFamily="2" charset="-78"/>
+                <a:ea typeface="Amiri" pitchFamily="2" charset="-78"/>
                 <a:cs typeface="Amiri" pitchFamily="2" charset="-78"/>
               </a:rPr>
               <a:t>م</a:t>
@@ -22375,6 +22535,7 @@
                   <a:srgbClr val="8A6D1E"/>
                 </a:solidFill>
                 <a:latin typeface="Amiri" pitchFamily="2" charset="-78"/>
+                <a:ea typeface="Amiri" pitchFamily="2" charset="-78"/>
                 <a:cs typeface="Amiri" pitchFamily="2" charset="-78"/>
               </a:rPr>
               <a:t>نَمُوذَجُ الإِجَابَةِ</a:t>
@@ -22617,6 +22778,7 @@
                   <a:srgbClr val="1B3B6F"/>
                 </a:solidFill>
                 <a:latin typeface="Amiri" pitchFamily="2" charset="-78"/>
+                <a:ea typeface="Amiri" pitchFamily="2" charset="-78"/>
                 <a:cs typeface="Amiri" pitchFamily="2" charset="-78"/>
               </a:rPr>
               <a:t>يُوجَدُ سَرِيرٌ وَمَكْتَبٌ وَخِزَانَةُ مَلَابِسَ.</a:t>
@@ -22693,6 +22855,7 @@
                   <a:srgbClr val="1B3B6F"/>
                 </a:solidFill>
                 <a:latin typeface="Amiri" pitchFamily="2" charset="-78"/>
+                <a:ea typeface="Amiri" pitchFamily="2" charset="-78"/>
                 <a:cs typeface="Amiri" pitchFamily="2" charset="-78"/>
               </a:rPr>
               <a:t>مَاذَا يُوجَدُ فِي غُرْفَتِكَ؟</a:t>
@@ -22796,6 +22959,7 @@
                   <a:srgbClr val="1B3B6F"/>
                 </a:solidFill>
                 <a:latin typeface="Amiri" pitchFamily="2" charset="-78"/>
+                <a:ea typeface="Amiri" pitchFamily="2" charset="-78"/>
                 <a:cs typeface="Amiri" pitchFamily="2" charset="-78"/>
               </a:rPr>
               <a:t>أَضَعُهَا عَلَى الرَّفِّ فَوْقَ المَكْتَبِ.</a:t>
@@ -22872,6 +23036,7 @@
                   <a:srgbClr val="1B3B6F"/>
                 </a:solidFill>
                 <a:latin typeface="Amiri" pitchFamily="2" charset="-78"/>
+                <a:ea typeface="Amiri" pitchFamily="2" charset="-78"/>
                 <a:cs typeface="Amiri" pitchFamily="2" charset="-78"/>
               </a:rPr>
               <a:t>أَيْنَ تَضَعُ كُتُبَكَ؟</a:t>
@@ -22975,6 +23140,7 @@
                   <a:srgbClr val="1B3B6F"/>
                 </a:solidFill>
                 <a:latin typeface="Amiri" pitchFamily="2" charset="-78"/>
+                <a:ea typeface="Amiri" pitchFamily="2" charset="-78"/>
                 <a:cs typeface="Amiri" pitchFamily="2" charset="-78"/>
               </a:rPr>
               <a:t>جُدْرَانُ غُرْفَتِي زَرْقَاءُ، وَالسَّتَائِرُ بَيْضَاءُ.</a:t>
@@ -23051,6 +23217,7 @@
                   <a:srgbClr val="1B3B6F"/>
                 </a:solidFill>
                 <a:latin typeface="Amiri" pitchFamily="2" charset="-78"/>
+                <a:ea typeface="Amiri" pitchFamily="2" charset="-78"/>
                 <a:cs typeface="Amiri" pitchFamily="2" charset="-78"/>
               </a:rPr>
               <a:t>مَا لَوْنُ غُرْفَتِكَ؟</a:t>
@@ -23154,6 +23321,7 @@
                   <a:srgbClr val="1B3B6F"/>
                 </a:solidFill>
                 <a:latin typeface="Amiri" pitchFamily="2" charset="-78"/>
+                <a:ea typeface="Amiri" pitchFamily="2" charset="-78"/>
                 <a:cs typeface="Amiri" pitchFamily="2" charset="-78"/>
               </a:rPr>
               <a:t>أَسْتَعْمِلُ المَيْكْرُوِيفَ كَثِيرًا، لِأَنَّهُ سَرِيعٌ.</a:t>
@@ -23230,6 +23398,7 @@
                   <a:srgbClr val="1B3B6F"/>
                 </a:solidFill>
                 <a:latin typeface="Amiri" pitchFamily="2" charset="-78"/>
+                <a:ea typeface="Amiri" pitchFamily="2" charset="-78"/>
                 <a:cs typeface="Amiri" pitchFamily="2" charset="-78"/>
               </a:rPr>
               <a:t>مَا الجِهَازُ الَّذِي تَسْتَعْمِلُهُ كَثِيرًا؟</a:t>
@@ -23333,6 +23502,7 @@
                   <a:srgbClr val="1B3B6F"/>
                 </a:solidFill>
                 <a:latin typeface="Amiri" pitchFamily="2" charset="-78"/>
+                <a:ea typeface="Amiri" pitchFamily="2" charset="-78"/>
                 <a:cs typeface="Amiri" pitchFamily="2" charset="-78"/>
               </a:rPr>
               <a:t>نَعَمْ، أُحِبُّهُ، لِأَنَّهُ جَدِيدٌ وَمُرِيحٌ.</a:t>
@@ -23409,6 +23579,7 @@
                   <a:srgbClr val="1B3B6F"/>
                 </a:solidFill>
                 <a:latin typeface="Amiri" pitchFamily="2" charset="-78"/>
+                <a:ea typeface="Amiri" pitchFamily="2" charset="-78"/>
                 <a:cs typeface="Amiri" pitchFamily="2" charset="-78"/>
               </a:rPr>
               <a:t>هَلْ تُحِبُّ أَثَاثَ غُرْفَتِكَ؟</a:t>
@@ -23618,6 +23789,7 @@
                   <a:srgbClr val="D4AF37"/>
                 </a:solidFill>
                 <a:latin typeface="Amiri" pitchFamily="2" charset="-78"/>
+                <a:ea typeface="Amiri" pitchFamily="2" charset="-78"/>
                 <a:cs typeface="Amiri" pitchFamily="2" charset="-78"/>
               </a:rPr>
               <a:t>م</a:t>
@@ -23938,6 +24110,7 @@
                   <a:srgbClr val="8A6D1E"/>
                 </a:solidFill>
                 <a:latin typeface="Amiri" pitchFamily="2" charset="-78"/>
+                <a:ea typeface="Amiri" pitchFamily="2" charset="-78"/>
                 <a:cs typeface="Amiri" pitchFamily="2" charset="-78"/>
               </a:rPr>
               <a:t>نَمُوذَجُ الإِجَابَةِ</a:t>
@@ -24180,6 +24353,7 @@
                   <a:srgbClr val="1B3B6F"/>
                 </a:solidFill>
                 <a:latin typeface="Amiri" pitchFamily="2" charset="-78"/>
+                <a:ea typeface="Amiri" pitchFamily="2" charset="-78"/>
                 <a:cs typeface="Amiri" pitchFamily="2" charset="-78"/>
               </a:rPr>
               <a:t>فِي غُرْفَةِ الجُلُوسِ كَنَبَةٌ كَبِيرَةٌ أَمَامَ التِّلْفَازِ، وَعَلَى الأَرْضِ سَجَّادَةٌ حَمْرَاءُ مِنْ إِيرَانَ.</a:t>
@@ -24256,6 +24430,7 @@
                   <a:srgbClr val="1B3B6F"/>
                 </a:solidFill>
                 <a:latin typeface="Amiri" pitchFamily="2" charset="-78"/>
+                <a:ea typeface="Amiri" pitchFamily="2" charset="-78"/>
                 <a:cs typeface="Amiri" pitchFamily="2" charset="-78"/>
               </a:rPr>
               <a:t>صِفْ غُرْفَةَ الجُلُوسِ فِي بَيْتِكُمْ.</a:t>
@@ -24359,6 +24534,7 @@
                   <a:srgbClr val="1B3B6F"/>
                 </a:solidFill>
                 <a:latin typeface="Amiri" pitchFamily="2" charset="-78"/>
+                <a:ea typeface="Amiri" pitchFamily="2" charset="-78"/>
                 <a:cs typeface="Amiri" pitchFamily="2" charset="-78"/>
               </a:rPr>
               <a:t>تَعَطَّلَ الفُرْنُ يَوْمَ العِيدِ، فَطَبَخَتْ أُمِّي فِي بَيْتِ جَارَتِنَا!</a:t>
@@ -24435,6 +24611,7 @@
                   <a:srgbClr val="1B3B6F"/>
                 </a:solidFill>
                 <a:latin typeface="Amiri" pitchFamily="2" charset="-78"/>
+                <a:ea typeface="Amiri" pitchFamily="2" charset="-78"/>
                 <a:cs typeface="Amiri" pitchFamily="2" charset="-78"/>
               </a:rPr>
               <a:t>مَا الجِهَازُ الَّذِي تَعَطَّلَ فِي بَيْتِكُمْ مُؤَخَّرًا؟</a:t>
@@ -24538,6 +24715,7 @@
                   <a:srgbClr val="1B3B6F"/>
                 </a:solidFill>
                 <a:latin typeface="Amiri" pitchFamily="2" charset="-78"/>
+                <a:ea typeface="Amiri" pitchFamily="2" charset="-78"/>
                 <a:cs typeface="Amiri" pitchFamily="2" charset="-78"/>
               </a:rPr>
               <a:t>أُرِيدُ أَنْ أُغَيِّرَ لَوْنَ الجُدْرَانِ، لِأَنَّهُ لَوْنٌ اخْتَارَهُ أَبِي عِنْدَمَا كُنْتُ طِفْلًا.</a:t>
@@ -24614,6 +24792,7 @@
                   <a:srgbClr val="1B3B6F"/>
                 </a:solidFill>
                 <a:latin typeface="Amiri" pitchFamily="2" charset="-78"/>
+                <a:ea typeface="Amiri" pitchFamily="2" charset="-78"/>
                 <a:cs typeface="Amiri" pitchFamily="2" charset="-78"/>
               </a:rPr>
               <a:t>مَاذَا تُرِيدُ أَنْ تُغَيِّرَ فِي غُرْفَتِكَ؟</a:t>
@@ -24717,6 +24896,7 @@
                   <a:srgbClr val="1B3B6F"/>
                 </a:solidFill>
                 <a:latin typeface="Amiri" pitchFamily="2" charset="-78"/>
+                <a:ea typeface="Amiri" pitchFamily="2" charset="-78"/>
                 <a:cs typeface="Amiri" pitchFamily="2" charset="-78"/>
               </a:rPr>
               <a:t>أُرَتِّبُهَا بِنَفْسِي كُلَّ يَوْمِ جُمُعَةٍ، لٰكِنَّ أُمِّي تُسَاعِدُنِي أَحْيَانًا.</a:t>
@@ -24793,6 +24973,7 @@
                   <a:srgbClr val="1B3B6F"/>
                 </a:solidFill>
                 <a:latin typeface="Amiri" pitchFamily="2" charset="-78"/>
+                <a:ea typeface="Amiri" pitchFamily="2" charset="-78"/>
                 <a:cs typeface="Amiri" pitchFamily="2" charset="-78"/>
               </a:rPr>
               <a:t>مَنْ يُرَتِّبُ غُرْفَتَكَ؟</a:t>
@@ -24896,6 +25077,7 @@
                   <a:srgbClr val="1B3B6F"/>
                 </a:solidFill>
                 <a:latin typeface="Amiri" pitchFamily="2" charset="-78"/>
+                <a:ea typeface="Amiri" pitchFamily="2" charset="-78"/>
                 <a:cs typeface="Amiri" pitchFamily="2" charset="-78"/>
               </a:rPr>
               <a:t>سَأَحْتَاجُ إِلَى مَكْتَبٍ كَبِيرٍ وَمِصْبَاحٍ جَيِّدٍ، لِأَنِّي سَأَدْرُسُ كَثِيرًا فِي اللَّيْلِ.</a:t>
@@ -24972,6 +25154,7 @@
                   <a:srgbClr val="1B3B6F"/>
                 </a:solidFill>
                 <a:latin typeface="Amiri" pitchFamily="2" charset="-78"/>
+                <a:ea typeface="Amiri" pitchFamily="2" charset="-78"/>
                 <a:cs typeface="Amiri" pitchFamily="2" charset="-78"/>
               </a:rPr>
               <a:t>مَا الأَثَاثُ الَّذِي سَتَحْتَاجُهُ فِي الجَامِعَةِ؟</a:t>
@@ -25181,6 +25364,7 @@
                   <a:srgbClr val="D4AF37"/>
                 </a:solidFill>
                 <a:latin typeface="Amiri" pitchFamily="2" charset="-78"/>
+                <a:ea typeface="Amiri" pitchFamily="2" charset="-78"/>
                 <a:cs typeface="Amiri" pitchFamily="2" charset="-78"/>
               </a:rPr>
               <a:t>م</a:t>
@@ -25501,6 +25685,7 @@
                   <a:srgbClr val="8A6D1E"/>
                 </a:solidFill>
                 <a:latin typeface="Amiri" pitchFamily="2" charset="-78"/>
+                <a:ea typeface="Amiri" pitchFamily="2" charset="-78"/>
                 <a:cs typeface="Amiri" pitchFamily="2" charset="-78"/>
               </a:rPr>
               <a:t>نَمُوذَجُ الإِجَابَةِ</a:t>
@@ -25743,6 +25928,7 @@
                   <a:srgbClr val="1B3B6F"/>
                 </a:solidFill>
                 <a:latin typeface="Amiri" pitchFamily="2" charset="-78"/>
+                <a:ea typeface="Amiri" pitchFamily="2" charset="-78"/>
                 <a:cs typeface="Amiri" pitchFamily="2" charset="-78"/>
               </a:rPr>
               <a:t>نَعَمْ، فِي رَأْيِي نَشْتَرِي أَجْهِزَةً كَثِيرَةً لَا نَسْتَعْمِلُهَا إِلَّا مَرَّةً، لِأَنَّ الإِعْلَانَاتِ تُقْنِعُنَا بِأَنَّنَا نَحْتَاجُهَا.</a:t>
@@ -25819,6 +26005,7 @@
                   <a:srgbClr val="1B3B6F"/>
                 </a:solidFill>
                 <a:latin typeface="Amiri" pitchFamily="2" charset="-78"/>
+                <a:ea typeface="Amiri" pitchFamily="2" charset="-78"/>
                 <a:cs typeface="Amiri" pitchFamily="2" charset="-78"/>
               </a:rPr>
               <a:t>هَلْ نَشْتَرِي أَجْهِزَةً أَكْثَرَ مِمَّا نَحْتَاجُ؟</a:t>
@@ -25922,6 +26109,7 @@
                   <a:srgbClr val="1B3B6F"/>
                 </a:solidFill>
                 <a:latin typeface="Amiri" pitchFamily="2" charset="-78"/>
+                <a:ea typeface="Amiri" pitchFamily="2" charset="-78"/>
                 <a:cs typeface="Amiri" pitchFamily="2" charset="-78"/>
               </a:rPr>
               <a:t>صَحِيحٌ أَنَّ الأَثَاثَ الجَدِيدَ أَرْخَصُ، غَيْرَ أَنَّ القَدِيمَ مَصْنُوعٌ مِنْ خَشَبٍ قَوِيٍّ يَبْقَى سَنَوَاتٍ طَوِيلَةً.</a:t>
@@ -25998,6 +26186,7 @@
                   <a:srgbClr val="1B3B6F"/>
                 </a:solidFill>
                 <a:latin typeface="Amiri" pitchFamily="2" charset="-78"/>
+                <a:ea typeface="Amiri" pitchFamily="2" charset="-78"/>
                 <a:cs typeface="Amiri" pitchFamily="2" charset="-78"/>
               </a:rPr>
               <a:t>هَلِ الأَثَاثُ القَدِيمُ أَفْضَلُ مِنَ الجَدِيدِ؟</a:t>
@@ -26101,6 +26290,7 @@
                   <a:srgbClr val="1B3B6F"/>
                 </a:solidFill>
                 <a:latin typeface="Amiri" pitchFamily="2" charset="-78"/>
+                <a:ea typeface="Amiri" pitchFamily="2" charset="-78"/>
                 <a:cs typeface="Amiri" pitchFamily="2" charset="-78"/>
               </a:rPr>
               <a:t>يَجِبُ أَنْ نُطْفِئَ الأَجْهِزَةَ الَّتِي لَا نَسْتَعْمِلُهَا، وَأَلَّا نَتْرُكَ الشَّاحِنَ فِي الكَهْرَبَاءِ طُولَ اللَّيْلِ.</a:t>
@@ -26177,6 +26367,7 @@
                   <a:srgbClr val="1B3B6F"/>
                 </a:solidFill>
                 <a:latin typeface="Amiri" pitchFamily="2" charset="-78"/>
+                <a:ea typeface="Amiri" pitchFamily="2" charset="-78"/>
                 <a:cs typeface="Amiri" pitchFamily="2" charset="-78"/>
               </a:rPr>
               <a:t>كَيْفَ نُقَلِّلُ اسْتِهْلَاكَ الكَهْرَبَاءِ فِي البَيْتِ؟</a:t>
@@ -26386,6 +26577,7 @@
                   <a:srgbClr val="D4AF37"/>
                 </a:solidFill>
                 <a:latin typeface="Amiri" pitchFamily="2" charset="-78"/>
+                <a:ea typeface="Amiri" pitchFamily="2" charset="-78"/>
                 <a:cs typeface="Amiri" pitchFamily="2" charset="-78"/>
               </a:rPr>
               <a:t>م</a:t>
@@ -26706,6 +26898,7 @@
                   <a:srgbClr val="8A6D1E"/>
                 </a:solidFill>
                 <a:latin typeface="Amiri" pitchFamily="2" charset="-78"/>
+                <a:ea typeface="Amiri" pitchFamily="2" charset="-78"/>
                 <a:cs typeface="Amiri" pitchFamily="2" charset="-78"/>
               </a:rPr>
               <a:t>نَمُوذَجُ الإِجَابَةِ</a:t>
@@ -26948,6 +27141,7 @@
                   <a:srgbClr val="1B3B6F"/>
                 </a:solidFill>
                 <a:latin typeface="Amiri" pitchFamily="2" charset="-78"/>
+                <a:ea typeface="Amiri" pitchFamily="2" charset="-78"/>
                 <a:cs typeface="Amiri" pitchFamily="2" charset="-78"/>
               </a:rPr>
               <a:t>كَانَ فِي بَيْتِ جَدِّي فُرْنٌ مِنَ الطِّينِ وَلَمْ تَكُنْ هُنَاكَ ثَلَّاجَةٌ، أَمَّا عِنْدَنَا فَفِي المَطْبَخِ وَحْدَهُ عَشَرَةُ أَجْهِزَةٍ!</a:t>
@@ -27024,6 +27218,7 @@
                   <a:srgbClr val="1B3B6F"/>
                 </a:solidFill>
                 <a:latin typeface="Amiri" pitchFamily="2" charset="-78"/>
+                <a:ea typeface="Amiri" pitchFamily="2" charset="-78"/>
                 <a:cs typeface="Amiri" pitchFamily="2" charset="-78"/>
               </a:rPr>
               <a:t>كَيْفَ كَانَ بَيْتُ أَجْدَادِكَ مُخْتَلِفًا؟</a:t>
@@ -27127,6 +27322,7 @@
                   <a:srgbClr val="1B3B6F"/>
                 </a:solidFill>
                 <a:latin typeface="Amiri" pitchFamily="2" charset="-78"/>
+                <a:ea typeface="Amiri" pitchFamily="2" charset="-78"/>
                 <a:cs typeface="Amiri" pitchFamily="2" charset="-78"/>
               </a:rPr>
               <a:t>لَوْ عِشْتُ أُسْبُوعًا بِلَا كَهْرَبَاءَ، لَقَرَأْتُ كُتُبًا كَثِيرَةً، وَلَلَعِبْتُ مَعَ إِخْوَتِي فِي الحَدِيقَةِ.</a:t>
@@ -27206,6 +27402,7 @@
                   <a:srgbClr val="1B3B6F"/>
                 </a:solidFill>
                 <a:latin typeface="Amiri" pitchFamily="2" charset="-78"/>
+                <a:ea typeface="Amiri" pitchFamily="2" charset="-78"/>
                 <a:cs typeface="Amiri" pitchFamily="2" charset="-78"/>
               </a:rPr>
               <a:t>لَوْ كَانَ عَلَيْكَ أَنْ تَعِيشَ أُسْبُوعًا بِلَا كَهْرَبَاءَ، كَيْفَ تَقْضِيهِ؟</a:t>
@@ -27415,6 +27612,7 @@
                   <a:srgbClr val="D4AF37"/>
                 </a:solidFill>
                 <a:latin typeface="Amiri" pitchFamily="2" charset="-78"/>
+                <a:ea typeface="Amiri" pitchFamily="2" charset="-78"/>
                 <a:cs typeface="Amiri" pitchFamily="2" charset="-78"/>
               </a:rPr>
               <a:t>م</a:t>
@@ -27735,6 +27933,7 @@
                   <a:srgbClr val="8A6D1E"/>
                 </a:solidFill>
                 <a:latin typeface="Amiri" pitchFamily="2" charset="-78"/>
+                <a:ea typeface="Amiri" pitchFamily="2" charset="-78"/>
                 <a:cs typeface="Amiri" pitchFamily="2" charset="-78"/>
               </a:rPr>
               <a:t>قَيِّمْ عَمَلَكَ</a:t>
@@ -28979,6 +29178,7 @@
                   <a:srgbClr val="FFFFFF"/>
                 </a:solidFill>
                 <a:latin typeface="Amiri" pitchFamily="2" charset="-78"/>
+                <a:ea typeface="Amiri" pitchFamily="2" charset="-78"/>
                 <a:cs typeface="Amiri" pitchFamily="2" charset="-78"/>
               </a:rPr>
               <a:t>أَحْسَنْتُمْ! إِلَى اللِّقَاءِ</a:t>
@@ -29131,6 +29331,7 @@
                   <a:srgbClr val="D4AF37"/>
                 </a:solidFill>
                 <a:latin typeface="Amiri" pitchFamily="2" charset="-78"/>
+                <a:ea typeface="Amiri" pitchFamily="2" charset="-78"/>
                 <a:cs typeface="Amiri" pitchFamily="2" charset="-78"/>
               </a:rPr>
               <a:t>وَرْشَةُ الكِتَابَةِ</a:t>
@@ -29264,6 +29465,7 @@
                   <a:srgbClr val="D4AF37"/>
                 </a:solidFill>
                 <a:latin typeface="Amiri" pitchFamily="2" charset="-78"/>
+                <a:ea typeface="Amiri" pitchFamily="2" charset="-78"/>
                 <a:cs typeface="Amiri" pitchFamily="2" charset="-78"/>
               </a:rPr>
               <a:t>م</a:t>
@@ -29584,6 +29786,7 @@
                   <a:srgbClr val="8A6D1E"/>
                 </a:solidFill>
                 <a:latin typeface="Amiri" pitchFamily="2" charset="-78"/>
+                <a:ea typeface="Amiri" pitchFamily="2" charset="-78"/>
                 <a:cs typeface="Amiri" pitchFamily="2" charset="-78"/>
               </a:rPr>
               <a:t>خَرِيطَةُ الوَرْشَةِ</a:t>
@@ -29898,6 +30101,7 @@
                   <a:srgbClr val="1B3B6F"/>
                 </a:solidFill>
                 <a:latin typeface="Amiri" pitchFamily="2" charset="-78"/>
+                <a:ea typeface="Amiri" pitchFamily="2" charset="-78"/>
                 <a:cs typeface="Amiri" pitchFamily="2" charset="-78"/>
               </a:rPr>
               <a:t>كَيْفَ</a:t>
@@ -30174,6 +30378,7 @@
                   <a:srgbClr val="1E6B52"/>
                 </a:solidFill>
                 <a:latin typeface="Amiri" pitchFamily="2" charset="-78"/>
+                <a:ea typeface="Amiri" pitchFamily="2" charset="-78"/>
                 <a:cs typeface="Amiri" pitchFamily="2" charset="-78"/>
               </a:rPr>
               <a:t>تَمْثِيلُ الدَّوْرِ</a:t>
@@ -30450,6 +30655,7 @@
                   <a:srgbClr val="8A6D1E"/>
                 </a:solidFill>
                 <a:latin typeface="Amiri" pitchFamily="2" charset="-78"/>
+                <a:ea typeface="Amiri" pitchFamily="2" charset="-78"/>
                 <a:cs typeface="Amiri" pitchFamily="2" charset="-78"/>
               </a:rPr>
               <a:t>النَّمُوذَجُ</a:t>
@@ -30726,6 +30932,7 @@
                   <a:srgbClr val="1E6B52"/>
                 </a:solidFill>
                 <a:latin typeface="Amiri" pitchFamily="2" charset="-78"/>
+                <a:ea typeface="Amiri" pitchFamily="2" charset="-78"/>
                 <a:cs typeface="Amiri" pitchFamily="2" charset="-78"/>
               </a:rPr>
               <a:t>المُحَادَثَةُ</a:t>
@@ -31002,6 +31209,7 @@
                   <a:srgbClr val="8A6D1E"/>
                 </a:solidFill>
                 <a:latin typeface="Amiri" pitchFamily="2" charset="-78"/>
+                <a:ea typeface="Amiri" pitchFamily="2" charset="-78"/>
                 <a:cs typeface="Amiri" pitchFamily="2" charset="-78"/>
               </a:rPr>
               <a:t>قَيِّمْ</a:t>
@@ -31245,6 +31453,7 @@
                   <a:srgbClr val="D4AF37"/>
                 </a:solidFill>
                 <a:latin typeface="Amiri" pitchFamily="2" charset="-78"/>
+                <a:ea typeface="Amiri" pitchFamily="2" charset="-78"/>
                 <a:cs typeface="Amiri" pitchFamily="2" charset="-78"/>
               </a:rPr>
               <a:t>م</a:t>
@@ -31565,6 +31774,7 @@
                   <a:srgbClr val="8A6D1E"/>
                 </a:solidFill>
                 <a:latin typeface="Amiri" pitchFamily="2" charset="-78"/>
+                <a:ea typeface="Amiri" pitchFamily="2" charset="-78"/>
                 <a:cs typeface="Amiri" pitchFamily="2" charset="-78"/>
               </a:rPr>
               <a:t>امْتِحَانُ التَّحَدُّثِ</a:t>
@@ -32189,6 +32399,7 @@
                   <a:srgbClr val="1B3B6F"/>
                 </a:solidFill>
                 <a:latin typeface="Amiri" pitchFamily="2" charset="-78"/>
+                <a:ea typeface="Amiri" pitchFamily="2" charset="-78"/>
                 <a:cs typeface="Amiri" pitchFamily="2" charset="-78"/>
               </a:rPr>
               <a:t>عَفْوًا، هَلْ يُمْكِنُ أَنْ تُعِيدَ السُّؤَالَ؟</a:t>
@@ -32288,6 +32499,7 @@
                   <a:srgbClr val="1B3B6F"/>
                 </a:solidFill>
                 <a:latin typeface="Amiri" pitchFamily="2" charset="-78"/>
+                <a:ea typeface="Amiri" pitchFamily="2" charset="-78"/>
                 <a:cs typeface="Amiri" pitchFamily="2" charset="-78"/>
               </a:rPr>
               <a:t>لَحْظَةً، دَعْنِي أُفَكِّرُ …</a:t>
@@ -32387,6 +32599,7 @@
                   <a:srgbClr val="1B3B6F"/>
                 </a:solidFill>
                 <a:latin typeface="Amiri" pitchFamily="2" charset="-78"/>
+                <a:ea typeface="Amiri" pitchFamily="2" charset="-78"/>
                 <a:cs typeface="Amiri" pitchFamily="2" charset="-78"/>
               </a:rPr>
               <a:t>أَقْصِدُ …</a:t>
@@ -32558,6 +32771,7 @@
                   <a:srgbClr val="D4AF37"/>
                 </a:solidFill>
                 <a:latin typeface="Amiri" pitchFamily="2" charset="-78"/>
+                <a:ea typeface="Amiri" pitchFamily="2" charset="-78"/>
                 <a:cs typeface="Amiri" pitchFamily="2" charset="-78"/>
               </a:rPr>
               <a:t>م</a:t>
@@ -32878,6 +33092,7 @@
                   <a:srgbClr val="8A6D1E"/>
                 </a:solidFill>
                 <a:latin typeface="Amiri" pitchFamily="2" charset="-78"/>
+                <a:ea typeface="Amiri" pitchFamily="2" charset="-78"/>
                 <a:cs typeface="Amiri" pitchFamily="2" charset="-78"/>
               </a:rPr>
               <a:t>مَاذَا فِي غُرْفَتِكَ؟</a:t>
@@ -33181,6 +33396,7 @@
                   <a:srgbClr val="1B3B6F"/>
                 </a:solidFill>
                 <a:latin typeface="Amiri" pitchFamily="2" charset="-78"/>
+                <a:ea typeface="Amiri" pitchFamily="2" charset="-78"/>
                 <a:cs typeface="Amiri" pitchFamily="2" charset="-78"/>
               </a:rPr>
               <a:t>سَرِيرٌ</a:t>
@@ -33338,6 +33554,7 @@
                   <a:srgbClr val="1B3B6F"/>
                 </a:solidFill>
                 <a:latin typeface="Amiri" pitchFamily="2" charset="-78"/>
+                <a:ea typeface="Amiri" pitchFamily="2" charset="-78"/>
                 <a:cs typeface="Amiri" pitchFamily="2" charset="-78"/>
               </a:rPr>
               <a:t>سَرِيرِي</a:t>
@@ -33441,6 +33658,7 @@
                   <a:srgbClr val="1B3B6F"/>
                 </a:solidFill>
                 <a:latin typeface="Amiri" pitchFamily="2" charset="-78"/>
+                <a:ea typeface="Amiri" pitchFamily="2" charset="-78"/>
                 <a:cs typeface="Amiri" pitchFamily="2" charset="-78"/>
               </a:rPr>
               <a:t>أَسِرَّةٌ</a:t>
@@ -33544,6 +33762,7 @@
                   <a:srgbClr val="1B3B6F"/>
                 </a:solidFill>
                 <a:latin typeface="Amiri" pitchFamily="2" charset="-78"/>
+                <a:ea typeface="Amiri" pitchFamily="2" charset="-78"/>
                 <a:cs typeface="Amiri" pitchFamily="2" charset="-78"/>
               </a:rPr>
               <a:t>سَرِيرٌ</a:t>
@@ -33809,6 +34028,7 @@
                   <a:srgbClr val="1B3B6F"/>
                 </a:solidFill>
                 <a:latin typeface="Amiri" pitchFamily="2" charset="-78"/>
+                <a:ea typeface="Amiri" pitchFamily="2" charset="-78"/>
                 <a:cs typeface="Amiri" pitchFamily="2" charset="-78"/>
               </a:rPr>
               <a:t>خِزَانَةُ المَلَابِسِ</a:t>
@@ -33966,6 +34186,7 @@
                   <a:srgbClr val="1B3B6F"/>
                 </a:solidFill>
                 <a:latin typeface="Amiri" pitchFamily="2" charset="-78"/>
+                <a:ea typeface="Amiri" pitchFamily="2" charset="-78"/>
                 <a:cs typeface="Amiri" pitchFamily="2" charset="-78"/>
               </a:rPr>
               <a:t>بَابُهَا</a:t>
@@ -34069,6 +34290,7 @@
                   <a:srgbClr val="1B3B6F"/>
                 </a:solidFill>
                 <a:latin typeface="Amiri" pitchFamily="2" charset="-78"/>
+                <a:ea typeface="Amiri" pitchFamily="2" charset="-78"/>
                 <a:cs typeface="Amiri" pitchFamily="2" charset="-78"/>
               </a:rPr>
               <a:t>خِزَانَاتٌ</a:t>
@@ -34334,6 +34556,7 @@
                   <a:srgbClr val="1B3B6F"/>
                 </a:solidFill>
                 <a:latin typeface="Amiri" pitchFamily="2" charset="-78"/>
+                <a:ea typeface="Amiri" pitchFamily="2" charset="-78"/>
                 <a:cs typeface="Amiri" pitchFamily="2" charset="-78"/>
               </a:rPr>
               <a:t>مَكْتَبٌ · كُرْسِيٌّ</a:t>
@@ -34491,6 +34714,7 @@
                   <a:srgbClr val="1B3B6F"/>
                 </a:solidFill>
                 <a:latin typeface="Amiri" pitchFamily="2" charset="-78"/>
+                <a:ea typeface="Amiri" pitchFamily="2" charset="-78"/>
                 <a:cs typeface="Amiri" pitchFamily="2" charset="-78"/>
               </a:rPr>
               <a:t>مَكَاتِبُ · كَرَاسِيُّ</a:t>
@@ -34756,6 +34980,7 @@
                   <a:srgbClr val="1B3B6F"/>
                 </a:solidFill>
                 <a:latin typeface="Amiri" pitchFamily="2" charset="-78"/>
+                <a:ea typeface="Amiri" pitchFamily="2" charset="-78"/>
                 <a:cs typeface="Amiri" pitchFamily="2" charset="-78"/>
               </a:rPr>
               <a:t>رَفٌّ</a:t>
@@ -34913,6 +35138,7 @@
                   <a:srgbClr val="1B3B6F"/>
                 </a:solidFill>
                 <a:latin typeface="Amiri" pitchFamily="2" charset="-78"/>
+                <a:ea typeface="Amiri" pitchFamily="2" charset="-78"/>
                 <a:cs typeface="Amiri" pitchFamily="2" charset="-78"/>
               </a:rPr>
               <a:t>رُفُوفٌ</a:t>
@@ -35016,6 +35242,7 @@
                   <a:srgbClr val="1B3B6F"/>
                 </a:solidFill>
                 <a:latin typeface="Amiri" pitchFamily="2" charset="-78"/>
+                <a:ea typeface="Amiri" pitchFamily="2" charset="-78"/>
                 <a:cs typeface="Amiri" pitchFamily="2" charset="-78"/>
               </a:rPr>
               <a:t>رَفٌّ</a:t>
@@ -35281,6 +35508,7 @@
                   <a:srgbClr val="1B3B6F"/>
                 </a:solidFill>
                 <a:latin typeface="Amiri" pitchFamily="2" charset="-78"/>
+                <a:ea typeface="Amiri" pitchFamily="2" charset="-78"/>
                 <a:cs typeface="Amiri" pitchFamily="2" charset="-78"/>
               </a:rPr>
               <a:t>سَجَّادَةٌ · سِتَارَةٌ</a:t>
@@ -35438,6 +35666,7 @@
                   <a:srgbClr val="1B3B6F"/>
                 </a:solidFill>
                 <a:latin typeface="Amiri" pitchFamily="2" charset="-78"/>
+                <a:ea typeface="Amiri" pitchFamily="2" charset="-78"/>
                 <a:cs typeface="Amiri" pitchFamily="2" charset="-78"/>
               </a:rPr>
               <a:t>سَجَّادٌ · سَتَائِرُ</a:t>
@@ -35703,6 +35932,7 @@
                   <a:srgbClr val="1B3B6F"/>
                 </a:solidFill>
                 <a:latin typeface="Amiri" pitchFamily="2" charset="-78"/>
+                <a:ea typeface="Amiri" pitchFamily="2" charset="-78"/>
                 <a:cs typeface="Amiri" pitchFamily="2" charset="-78"/>
               </a:rPr>
               <a:t>ثَلَّاجَةٌ</a:t>
@@ -35860,6 +36090,7 @@
                   <a:srgbClr val="1B3B6F"/>
                 </a:solidFill>
                 <a:latin typeface="Amiri" pitchFamily="2" charset="-78"/>
+                <a:ea typeface="Amiri" pitchFamily="2" charset="-78"/>
                 <a:cs typeface="Amiri" pitchFamily="2" charset="-78"/>
               </a:rPr>
               <a:t>ثَلَّاجَاتٌ</a:t>
@@ -35963,6 +36194,7 @@
                   <a:srgbClr val="1B3B6F"/>
                 </a:solidFill>
                 <a:latin typeface="Amiri" pitchFamily="2" charset="-78"/>
+                <a:ea typeface="Amiri" pitchFamily="2" charset="-78"/>
                 <a:cs typeface="Amiri" pitchFamily="2" charset="-78"/>
               </a:rPr>
               <a:t>ثَلَّاجَةٌ</a:t>
@@ -36096,6 +36328,7 @@
                   <a:srgbClr val="D4AF37"/>
                 </a:solidFill>
                 <a:latin typeface="Amiri" pitchFamily="2" charset="-78"/>
+                <a:ea typeface="Amiri" pitchFamily="2" charset="-78"/>
                 <a:cs typeface="Amiri" pitchFamily="2" charset="-78"/>
               </a:rPr>
               <a:t>م</a:t>
@@ -36416,6 +36649,7 @@
                   <a:srgbClr val="8A6D1E"/>
                 </a:solidFill>
                 <a:latin typeface="Amiri" pitchFamily="2" charset="-78"/>
+                <a:ea typeface="Amiri" pitchFamily="2" charset="-78"/>
                 <a:cs typeface="Amiri" pitchFamily="2" charset="-78"/>
               </a:rPr>
               <a:t>لِمَاذَا نَسْتَعْمِلُهُ؟</a:t>
@@ -36719,6 +36953,7 @@
                   <a:srgbClr val="1B3B6F"/>
                 </a:solidFill>
                 <a:latin typeface="Amiri" pitchFamily="2" charset="-78"/>
+                <a:ea typeface="Amiri" pitchFamily="2" charset="-78"/>
                 <a:cs typeface="Amiri" pitchFamily="2" charset="-78"/>
               </a:rPr>
               <a:t>غَسَّالَةٌ</a:t>
@@ -36876,6 +37111,7 @@
                   <a:srgbClr val="1B3B6F"/>
                 </a:solidFill>
                 <a:latin typeface="Amiri" pitchFamily="2" charset="-78"/>
+                <a:ea typeface="Amiri" pitchFamily="2" charset="-78"/>
                 <a:cs typeface="Amiri" pitchFamily="2" charset="-78"/>
               </a:rPr>
               <a:t>غَسَّالَاتٌ</a:t>
@@ -36979,6 +37215,7 @@
                   <a:srgbClr val="1B3B6F"/>
                 </a:solidFill>
                 <a:latin typeface="Amiri" pitchFamily="2" charset="-78"/>
+                <a:ea typeface="Amiri" pitchFamily="2" charset="-78"/>
                 <a:cs typeface="Amiri" pitchFamily="2" charset="-78"/>
               </a:rPr>
               <a:t>غَسَّالَةٌ</a:t>
@@ -37244,6 +37481,7 @@
                   <a:srgbClr val="1B3B6F"/>
                 </a:solidFill>
                 <a:latin typeface="Amiri" pitchFamily="2" charset="-78"/>
+                <a:ea typeface="Amiri" pitchFamily="2" charset="-78"/>
                 <a:cs typeface="Amiri" pitchFamily="2" charset="-78"/>
               </a:rPr>
               <a:t>فُرْنٌ</a:t>
@@ -37401,6 +37639,7 @@
                   <a:srgbClr val="1B3B6F"/>
                 </a:solidFill>
                 <a:latin typeface="Amiri" pitchFamily="2" charset="-78"/>
+                <a:ea typeface="Amiri" pitchFamily="2" charset="-78"/>
                 <a:cs typeface="Amiri" pitchFamily="2" charset="-78"/>
               </a:rPr>
               <a:t>أَفْرَانٌ</a:t>
@@ -37504,6 +37743,7 @@
                   <a:srgbClr val="1B3B6F"/>
                 </a:solidFill>
                 <a:latin typeface="Amiri" pitchFamily="2" charset="-78"/>
+                <a:ea typeface="Amiri" pitchFamily="2" charset="-78"/>
                 <a:cs typeface="Amiri" pitchFamily="2" charset="-78"/>
               </a:rPr>
               <a:t>فُرْنٌ</a:t>
@@ -37769,6 +38009,7 @@
                   <a:srgbClr val="1B3B6F"/>
                 </a:solidFill>
                 <a:latin typeface="Amiri" pitchFamily="2" charset="-78"/>
+                <a:ea typeface="Amiri" pitchFamily="2" charset="-78"/>
                 <a:cs typeface="Amiri" pitchFamily="2" charset="-78"/>
               </a:rPr>
               <a:t>نَسْتَعْمِلُهُ لِلطَّبْخِ</a:t>
@@ -37926,6 +38167,7 @@
                   <a:srgbClr val="1B3B6F"/>
                 </a:solidFill>
                 <a:latin typeface="Amiri" pitchFamily="2" charset="-78"/>
+                <a:ea typeface="Amiri" pitchFamily="2" charset="-78"/>
                 <a:cs typeface="Amiri" pitchFamily="2" charset="-78"/>
               </a:rPr>
               <a:t>أَسْتَعْمِلُهُ</a:t>
@@ -38029,6 +38271,7 @@
                   <a:srgbClr val="1B3B6F"/>
                 </a:solidFill>
                 <a:latin typeface="Amiri" pitchFamily="2" charset="-78"/>
+                <a:ea typeface="Amiri" pitchFamily="2" charset="-78"/>
                 <a:cs typeface="Amiri" pitchFamily="2" charset="-78"/>
               </a:rPr>
               <a:t>نَسْتَعْمِلُهَا</a:t>
@@ -38294,6 +38537,7 @@
                   <a:srgbClr val="1B3B6F"/>
                 </a:solidFill>
                 <a:latin typeface="Amiri" pitchFamily="2" charset="-78"/>
+                <a:ea typeface="Amiri" pitchFamily="2" charset="-78"/>
                 <a:cs typeface="Amiri" pitchFamily="2" charset="-78"/>
               </a:rPr>
               <a:t>مُعَطَّلٌ</a:t>
@@ -38451,6 +38695,7 @@
                   <a:srgbClr val="1B3B6F"/>
                 </a:solidFill>
                 <a:latin typeface="Amiri" pitchFamily="2" charset="-78"/>
+                <a:ea typeface="Amiri" pitchFamily="2" charset="-78"/>
                 <a:cs typeface="Amiri" pitchFamily="2" charset="-78"/>
               </a:rPr>
               <a:t>مُعَطَّلَةٌ</a:t>
@@ -38554,6 +38799,7 @@
                   <a:srgbClr val="1B3B6F"/>
                 </a:solidFill>
                 <a:latin typeface="Amiri" pitchFamily="2" charset="-78"/>
+                <a:ea typeface="Amiri" pitchFamily="2" charset="-78"/>
                 <a:cs typeface="Amiri" pitchFamily="2" charset="-78"/>
               </a:rPr>
               <a:t>مُعَطَّلَةٌ</a:t>
@@ -38657,6 +38903,7 @@
                   <a:srgbClr val="1B3B6F"/>
                 </a:solidFill>
                 <a:latin typeface="Amiri" pitchFamily="2" charset="-78"/>
+                <a:ea typeface="Amiri" pitchFamily="2" charset="-78"/>
                 <a:cs typeface="Amiri" pitchFamily="2" charset="-78"/>
               </a:rPr>
               <a:t>مُعَطَّلٌ</a:t>
@@ -38922,6 +39169,7 @@
                   <a:srgbClr val="1B3B6F"/>
                 </a:solidFill>
                 <a:latin typeface="Amiri" pitchFamily="2" charset="-78"/>
+                <a:ea typeface="Amiri" pitchFamily="2" charset="-78"/>
                 <a:cs typeface="Amiri" pitchFamily="2" charset="-78"/>
               </a:rPr>
               <a:t>قَدِيمٌ · جَدِيدٌ</a:t>
@@ -39079,6 +39327,7 @@
                   <a:srgbClr val="1B3B6F"/>
                 </a:solidFill>
                 <a:latin typeface="Amiri" pitchFamily="2" charset="-78"/>
+                <a:ea typeface="Amiri" pitchFamily="2" charset="-78"/>
                 <a:cs typeface="Amiri" pitchFamily="2" charset="-78"/>
               </a:rPr>
               <a:t>قُدَامَى · جُدُدٌ</a:t>
@@ -39182,6 +39431,7 @@
                   <a:srgbClr val="1B3B6F"/>
                 </a:solidFill>
                 <a:latin typeface="Amiri" pitchFamily="2" charset="-78"/>
+                <a:ea typeface="Amiri" pitchFamily="2" charset="-78"/>
                 <a:cs typeface="Amiri" pitchFamily="2" charset="-78"/>
               </a:rPr>
               <a:t>قَدِيمَةٌ · جَدِيدَةٌ</a:t>
@@ -39447,6 +39697,7 @@
                   <a:srgbClr val="1B3B6F"/>
                 </a:solidFill>
                 <a:latin typeface="Amiri" pitchFamily="2" charset="-78"/>
+                <a:ea typeface="Amiri" pitchFamily="2" charset="-78"/>
                 <a:cs typeface="Amiri" pitchFamily="2" charset="-78"/>
               </a:rPr>
               <a:t>الَّذِي · الَّتِي</a:t>
@@ -39496,11 +39747,12 @@
               <a:buNone/>
             </a:pPr>
             <a:r>
-              <a:rPr lang="en-US" sz="1100" i="1" dirty="0">
+              <a:rPr lang="ar-SA" sz="1100" i="1" dirty="0">
                 <a:solidFill>
                   <a:srgbClr val="5A6472"/>
                 </a:solidFill>
                 <a:latin typeface="Calibri" pitchFamily="34" charset="0"/>
+                <a:ea typeface="Amiri" pitchFamily="2" charset="-78"/>
                 <a:cs typeface="Amiri" pitchFamily="2" charset="-78"/>
               </a:rPr>
               <a:t>al-َ-dhī · al-َ-tī</a:t>
@@ -39604,6 +39856,7 @@
                   <a:srgbClr val="1B3B6F"/>
                 </a:solidFill>
                 <a:latin typeface="Amiri" pitchFamily="2" charset="-78"/>
+                <a:ea typeface="Amiri" pitchFamily="2" charset="-78"/>
                 <a:cs typeface="Amiri" pitchFamily="2" charset="-78"/>
               </a:rPr>
               <a:t>الخِزَانَةُ الَّتِي …</a:t>
@@ -39707,6 +39960,7 @@
                   <a:srgbClr val="1B3B6F"/>
                 </a:solidFill>
                 <a:latin typeface="Amiri" pitchFamily="2" charset="-78"/>
+                <a:ea typeface="Amiri" pitchFamily="2" charset="-78"/>
                 <a:cs typeface="Amiri" pitchFamily="2" charset="-78"/>
               </a:rPr>
               <a:t>المَكْتَبُ الَّذِي …</a:t>
@@ -39840,6 +40094,7 @@
                   <a:srgbClr val="D4AF37"/>
                 </a:solidFill>
                 <a:latin typeface="Amiri" pitchFamily="2" charset="-78"/>
+                <a:ea typeface="Amiri" pitchFamily="2" charset="-78"/>
                 <a:cs typeface="Amiri" pitchFamily="2" charset="-78"/>
               </a:rPr>
               <a:t>م</a:t>
@@ -40160,6 +40415,7 @@
                   <a:srgbClr val="8A6D1E"/>
                 </a:solidFill>
                 <a:latin typeface="Amiri" pitchFamily="2" charset="-78"/>
+                <a:ea typeface="Amiri" pitchFamily="2" charset="-78"/>
                 <a:cs typeface="Amiri" pitchFamily="2" charset="-78"/>
               </a:rPr>
               <a:t>فِي الغُرَفِ</a:t>
@@ -41336,6 +41592,7 @@
                   <a:srgbClr val="1B3B6F"/>
                 </a:solidFill>
                 <a:latin typeface="Amiri" pitchFamily="2" charset="-78"/>
+                <a:ea typeface="Amiri" pitchFamily="2" charset="-78"/>
                 <a:cs typeface="Amiri" pitchFamily="2" charset="-78"/>
               </a:rPr>
               <a:t>دَوْرُكَ!</a:t>
@@ -41412,6 +41669,7 @@
                   <a:srgbClr val="1B3B6F"/>
                 </a:solidFill>
                 <a:latin typeface="Amiri" pitchFamily="2" charset="-78"/>
+                <a:ea typeface="Amiri" pitchFamily="2" charset="-78"/>
                 <a:cs typeface="Amiri" pitchFamily="2" charset="-78"/>
               </a:rPr>
               <a:t>أَحْسَنْتَ! / أَحْسَنْتِ!</a:t>
@@ -41488,6 +41746,7 @@
                   <a:srgbClr val="1B3B6F"/>
                 </a:solidFill>
                 <a:latin typeface="Amiri" pitchFamily="2" charset="-78"/>
+                <a:ea typeface="Amiri" pitchFamily="2" charset="-78"/>
                 <a:cs typeface="Amiri" pitchFamily="2" charset="-78"/>
               </a:rPr>
               <a:t>تَكَلَّمْ أَكْثَرَ، مِنْ فَضْلِكَ</a:t>
@@ -41564,6 +41823,7 @@
                   <a:srgbClr val="1B3B6F"/>
                 </a:solidFill>
                 <a:latin typeface="Amiri" pitchFamily="2" charset="-78"/>
+                <a:ea typeface="Amiri" pitchFamily="2" charset="-78"/>
                 <a:cs typeface="Amiri" pitchFamily="2" charset="-78"/>
               </a:rPr>
               <a:t>لِمَاذَا؟</a:t>
@@ -41735,6 +41995,7 @@
                   <a:srgbClr val="D4AF37"/>
                 </a:solidFill>
                 <a:latin typeface="Amiri" pitchFamily="2" charset="-78"/>
+                <a:ea typeface="Amiri" pitchFamily="2" charset="-78"/>
                 <a:cs typeface="Amiri" pitchFamily="2" charset="-78"/>
               </a:rPr>
               <a:t>م</a:t>
@@ -42055,6 +42316,7 @@
                   <a:srgbClr val="8A6D1E"/>
                 </a:solidFill>
                 <a:latin typeface="Amiri" pitchFamily="2" charset="-78"/>
+                <a:ea typeface="Amiri" pitchFamily="2" charset="-78"/>
                 <a:cs typeface="Amiri" pitchFamily="2" charset="-78"/>
               </a:rPr>
               <a:t>فِي مَحَلِّ الأَثَاثِ</a:t>
@@ -42335,6 +42597,7 @@
                   <a:srgbClr val="1B3B6F"/>
                 </a:solidFill>
                 <a:latin typeface="Amiri" pitchFamily="2" charset="-78"/>
+                <a:ea typeface="Amiri" pitchFamily="2" charset="-78"/>
                 <a:cs typeface="Amiri" pitchFamily="2" charset="-78"/>
               </a:rPr>
               <a:t>أُرِيدُ … لِغُرْفَتِي</a:t>
@@ -42411,6 +42674,7 @@
                   <a:srgbClr val="1B3B6F"/>
                 </a:solidFill>
                 <a:latin typeface="Amiri" pitchFamily="2" charset="-78"/>
+                <a:ea typeface="Amiri" pitchFamily="2" charset="-78"/>
                 <a:cs typeface="Amiri" pitchFamily="2" charset="-78"/>
               </a:rPr>
               <a:t>أَهْلًا، مَاذَا تُرِيدُ؟</a:t>
@@ -42579,6 +42843,7 @@
                   <a:srgbClr val="1B3B6F"/>
                 </a:solidFill>
                 <a:latin typeface="Amiri" pitchFamily="2" charset="-78"/>
+                <a:ea typeface="Amiri" pitchFamily="2" charset="-78"/>
                 <a:cs typeface="Amiri" pitchFamily="2" charset="-78"/>
               </a:rPr>
               <a:t>أُفَضِّلُ … لِأَنَّ …</a:t>
@@ -42655,6 +42920,7 @@
                   <a:srgbClr val="1B3B6F"/>
                 </a:solidFill>
                 <a:latin typeface="Amiri" pitchFamily="2" charset="-78"/>
+                <a:ea typeface="Amiri" pitchFamily="2" charset="-78"/>
                 <a:cs typeface="Amiri" pitchFamily="2" charset="-78"/>
               </a:rPr>
               <a:t>أَيَّ لَوْنٍ تُفَضِّلُ؟</a:t>
@@ -42823,6 +43089,7 @@
                   <a:srgbClr val="1B3B6F"/>
                 </a:solidFill>
                 <a:latin typeface="Amiri" pitchFamily="2" charset="-78"/>
+                <a:ea typeface="Amiri" pitchFamily="2" charset="-78"/>
                 <a:cs typeface="Amiri" pitchFamily="2" charset="-78"/>
               </a:rPr>
               <a:t>هٰذَا غَالٍ، هَلْ عِنْدَكُمْ …؟</a:t>
@@ -42899,6 +43166,7 @@
                   <a:srgbClr val="1B3B6F"/>
                 </a:solidFill>
                 <a:latin typeface="Amiri" pitchFamily="2" charset="-78"/>
+                <a:ea typeface="Amiri" pitchFamily="2" charset="-78"/>
                 <a:cs typeface="Amiri" pitchFamily="2" charset="-78"/>
               </a:rPr>
               <a:t>هٰذَا المَكْتَبُ بِمِئَةِ جُنَيْهٍ.</a:t>
@@ -43067,6 +43335,7 @@
                   <a:srgbClr val="1B3B6F"/>
                 </a:solidFill>
                 <a:latin typeface="Amiri" pitchFamily="2" charset="-78"/>
+                <a:ea typeface="Amiri" pitchFamily="2" charset="-78"/>
                 <a:cs typeface="Amiri" pitchFamily="2" charset="-78"/>
               </a:rPr>
               <a:t>سَآخُذُهُ … سَأَضَعُهُ …</a:t>
@@ -43143,6 +43412,7 @@
                   <a:srgbClr val="1B3B6F"/>
                 </a:solidFill>
                 <a:latin typeface="Amiri" pitchFamily="2" charset="-78"/>
+                <a:ea typeface="Amiri" pitchFamily="2" charset="-78"/>
                 <a:cs typeface="Amiri" pitchFamily="2" charset="-78"/>
               </a:rPr>
               <a:t>هٰذَا بِسِتِّينَ جُنَيْهًا، وَفِيهِ ثَلَاثَةُ أَدْرَاجٍ.</a:t>
@@ -43311,6 +43581,7 @@
                   <a:srgbClr val="1B3B6F"/>
                 </a:solidFill>
                 <a:latin typeface="Amiri" pitchFamily="2" charset="-78"/>
+                <a:ea typeface="Amiri" pitchFamily="2" charset="-78"/>
                 <a:cs typeface="Amiri" pitchFamily="2" charset="-78"/>
               </a:rPr>
               <a:t>نَعَمْ، … يَوْمَ …</a:t>
@@ -43387,6 +43658,7 @@
                   <a:srgbClr val="1B3B6F"/>
                 </a:solidFill>
                 <a:latin typeface="Amiri" pitchFamily="2" charset="-78"/>
+                <a:ea typeface="Amiri" pitchFamily="2" charset="-78"/>
                 <a:cs typeface="Amiri" pitchFamily="2" charset="-78"/>
               </a:rPr>
               <a:t>هَلْ تُرِيدُ أَنْ نُوَصِّلَهُ إِلَى بَيْتِكَ؟</a:t>
@@ -43661,6 +43933,7 @@
                   <a:srgbClr val="D4AF37"/>
                 </a:solidFill>
                 <a:latin typeface="Amiri" pitchFamily="2" charset="-78"/>
+                <a:ea typeface="Amiri" pitchFamily="2" charset="-78"/>
                 <a:cs typeface="Amiri" pitchFamily="2" charset="-78"/>
               </a:rPr>
               <a:t>م</a:t>
@@ -43981,6 +44254,7 @@
                   <a:srgbClr val="8A6D1E"/>
                 </a:solidFill>
                 <a:latin typeface="Amiri" pitchFamily="2" charset="-78"/>
+                <a:ea typeface="Amiri" pitchFamily="2" charset="-78"/>
                 <a:cs typeface="Amiri" pitchFamily="2" charset="-78"/>
               </a:rPr>
               <a:t>جِهَازٌ مُعَطَّلٌ</a:t>
@@ -44261,6 +44535,7 @@
                   <a:srgbClr val="1B3B6F"/>
                 </a:solidFill>
                 <a:latin typeface="Amiri" pitchFamily="2" charset="-78"/>
+                <a:ea typeface="Amiri" pitchFamily="2" charset="-78"/>
                 <a:cs typeface="Amiri" pitchFamily="2" charset="-78"/>
               </a:rPr>
               <a:t>الغَسَّالَةُ مُعَطَّلَةٌ / الثَّلَّاجَةُ مُعَطَّلَةٌ</a:t>
@@ -44337,6 +44612,7 @@
                   <a:srgbClr val="1B3B6F"/>
                 </a:solidFill>
                 <a:latin typeface="Amiri" pitchFamily="2" charset="-78"/>
+                <a:ea typeface="Amiri" pitchFamily="2" charset="-78"/>
                 <a:cs typeface="Amiri" pitchFamily="2" charset="-78"/>
               </a:rPr>
               <a:t>أَلُو، نَعَمْ؟</a:t>
@@ -44505,6 +44781,7 @@
                   <a:srgbClr val="1B3B6F"/>
                 </a:solidFill>
                 <a:latin typeface="Amiri" pitchFamily="2" charset="-78"/>
+                <a:ea typeface="Amiri" pitchFamily="2" charset="-78"/>
                 <a:cs typeface="Amiri" pitchFamily="2" charset="-78"/>
               </a:rPr>
               <a:t>مُنْذُ …</a:t>
@@ -44581,6 +44858,7 @@
                   <a:srgbClr val="1B3B6F"/>
                 </a:solidFill>
                 <a:latin typeface="Amiri" pitchFamily="2" charset="-78"/>
+                <a:ea typeface="Amiri" pitchFamily="2" charset="-78"/>
                 <a:cs typeface="Amiri" pitchFamily="2" charset="-78"/>
               </a:rPr>
               <a:t>مُنْذُ مَتَى؟</a:t>
@@ -44749,6 +45027,7 @@
                   <a:srgbClr val="1B3B6F"/>
                 </a:solidFill>
                 <a:latin typeface="Amiri" pitchFamily="2" charset="-78"/>
+                <a:ea typeface="Amiri" pitchFamily="2" charset="-78"/>
                 <a:cs typeface="Amiri" pitchFamily="2" charset="-78"/>
               </a:rPr>
               <a:t>عِنْدَمَا … لَا …</a:t>
@@ -44825,6 +45104,7 @@
                   <a:srgbClr val="1B3B6F"/>
                 </a:solidFill>
                 <a:latin typeface="Amiri" pitchFamily="2" charset="-78"/>
+                <a:ea typeface="Amiri" pitchFamily="2" charset="-78"/>
                 <a:cs typeface="Amiri" pitchFamily="2" charset="-78"/>
               </a:rPr>
               <a:t>مَا المُشْكِلَةُ بِالضَّبْطِ؟</a:t>
@@ -44928,6 +45208,7 @@
                   <a:srgbClr val="1B3B6F"/>
                 </a:solidFill>
                 <a:latin typeface="Amiri" pitchFamily="2" charset="-78"/>
+                <a:ea typeface="Amiri" pitchFamily="2" charset="-78"/>
                 <a:cs typeface="Amiri" pitchFamily="2" charset="-78"/>
               </a:rPr>
               <a:t>مَتَى …؟</a:t>
@@ -45004,6 +45285,7 @@
                   <a:srgbClr val="1B3B6F"/>
                 </a:solidFill>
                 <a:latin typeface="Amiri" pitchFamily="2" charset="-78"/>
+                <a:ea typeface="Amiri" pitchFamily="2" charset="-78"/>
                 <a:cs typeface="Amiri" pitchFamily="2" charset="-78"/>
               </a:rPr>
               <a:t>سَأُرْسِلُ فَنِّيًّا.</a:t>
@@ -45107,6 +45389,7 @@
                   <a:srgbClr val="1B3B6F"/>
                 </a:solidFill>
                 <a:latin typeface="Amiri" pitchFamily="2" charset="-78"/>
+                <a:ea typeface="Amiri" pitchFamily="2" charset="-78"/>
                 <a:cs typeface="Amiri" pitchFamily="2" charset="-78"/>
               </a:rPr>
               <a:t>نَعَمْ، … أَيْضًا …</a:t>
@@ -45183,6 +45466,7 @@
                   <a:srgbClr val="1B3B6F"/>
                 </a:solidFill>
                 <a:latin typeface="Amiri" pitchFamily="2" charset="-78"/>
+                <a:ea typeface="Amiri" pitchFamily="2" charset="-78"/>
                 <a:cs typeface="Amiri" pitchFamily="2" charset="-78"/>
               </a:rPr>
               <a:t>هَلْ هُنَاكَ مُشْكِلَةٌ أُخْرَى؟</a:t>
@@ -45357,13 +45641,9 @@
     <a:fontScheme name="Office">
       <a:majorFont>
         <a:latin typeface="Calibri Light" panose="020F0302020204030204"/>
-        <a:ea typeface=""/>
-        <a:cs typeface=""/>
-        <a:font script="Jpan" typeface="游ゴシック Light"/>
-        <a:font script="Hang" typeface="맑은 고딕"/>
-        <a:font script="Hans" typeface="等线 Light"/>
-        <a:font script="Hant" typeface="新細明體"/>
-        <a:font script="Arab" typeface="Times New Roman"/>
+        <a:ea typeface="Amiri" pitchFamily="2" charset="-78"/>
+        <a:cs typeface="Amiri" pitchFamily="2" charset="-78"/>
+        <a:font script="Arab" typeface="Amiri"/>
         <a:font script="Hebr" typeface="Times New Roman"/>
         <a:font script="Thai" typeface="Angsana New"/>
         <a:font script="Ethi" typeface="Nyala"/>
@@ -45409,13 +45689,9 @@
       </a:majorFont>
       <a:minorFont>
         <a:latin typeface="Calibri" panose="020F0502020204030204"/>
-        <a:ea typeface=""/>
-        <a:cs typeface=""/>
-        <a:font script="Jpan" typeface="游ゴシック"/>
-        <a:font script="Hang" typeface="맑은 고딕"/>
-        <a:font script="Hans" typeface="等线"/>
-        <a:font script="Hant" typeface="新細明體"/>
-        <a:font script="Arab" typeface="Arial"/>
+        <a:ea typeface="Amiri" pitchFamily="2" charset="-78"/>
+        <a:cs typeface="Amiri" pitchFamily="2" charset="-78"/>
+        <a:font script="Arab" typeface="Amiri"/>
         <a:font script="Hebr" typeface="Arial"/>
         <a:font script="Thai" typeface="Cordia New"/>
         <a:font script="Ethi" typeface="Nyala"/>
